--- a/chapter1/clips/clip-04-characteristics-of-good-datasets/clip.pptx
+++ b/chapter1/clips/clip-04-characteristics-of-good-datasets/clip.pptx
@@ -9,10 +9,9 @@
     <p:sldId id="257" r:id="rId8"/>
     <p:sldId id="258" r:id="rId9"/>
     <p:sldId id="259" r:id="rId10"/>
-    <p:sldId id="260" r:id="rId11"/>
-    <p:sldId id="261" r:id="rId12"/>
-    <p:sldId id="262" r:id="rId13"/>
-    <p:sldId id="263" r:id="rId14"/>
+    <p:sldId id="260" r:id="rId12"/>
+    <p:sldId id="261" r:id="rId13"/>
+    <p:sldId id="262" r:id="rId14"/>
   </p:sldIdLst>
   <p:sldSz cx="12191695" cy="6858000" type="screen4x3"/>
   <p:notesSz cx="6858000" cy="9144000"/>
@@ -112,6 +111,516 @@
     </a:lvl9pPr>
   </p:defaultTextStyle>
 </p:presentation>
+</file>
+
+<file path=ppt/notesMasters/notesMaster1.xml><?xml version="1.0" encoding="utf-8"?>
+<p:notesMaster xmlns:a="http://schemas.openxmlformats.org/drawingml/2006/main" xmlns:p="http://schemas.openxmlformats.org/presentationml/2006/main" xmlns:r="http://schemas.openxmlformats.org/officeDocument/2006/relationships">
+  <p:cSld>
+    <p:bg>
+      <p:bgRef idx="1001">
+        <a:schemeClr val="bg1"/>
+      </p:bgRef>
+    </p:bg>
+    <p:spTree>
+      <p:nvGrpSpPr>
+        <p:cNvPr id="1" name=""/>
+        <p:cNvGrpSpPr/>
+        <p:nvPr/>
+      </p:nvGrpSpPr>
+      <p:grpSpPr>
+        <a:xfrm>
+          <a:off x="0" y="0"/>
+          <a:ext cx="0" cy="0"/>
+          <a:chOff x="0" y="0"/>
+          <a:chExt cx="0" cy="0"/>
+        </a:xfrm>
+      </p:grpSpPr>
+      <p:sp>
+        <p:nvSpPr>
+          <p:cNvPr id="2" name="Header Placeholder 1"/>
+          <p:cNvSpPr>
+            <a:spLocks noGrp="1"/>
+          </p:cNvSpPr>
+          <p:nvPr>
+            <p:ph type="hdr" sz="quarter"/>
+          </p:nvPr>
+        </p:nvSpPr>
+        <p:spPr>
+          <a:xfrm>
+            <a:off x="0" y="0"/>
+            <a:ext cx="2971800" cy="457200"/>
+          </a:xfrm>
+          <a:prstGeom prst="rect">
+            <a:avLst/>
+          </a:prstGeom>
+        </p:spPr>
+        <p:txBody>
+          <a:bodyPr vert="horz" lIns="91440" tIns="45720" rIns="91440" bIns="45720" rtlCol="0"/>
+          <a:lstStyle>
+            <a:lvl1pPr algn="l">
+              <a:defRPr sz="1200"/>
+            </a:lvl1pPr>
+          </a:lstStyle>
+          <a:p>
+            <a:endParaRPr lang="en-US"/>
+          </a:p>
+        </p:txBody>
+      </p:sp>
+      <p:sp>
+        <p:nvSpPr>
+          <p:cNvPr id="3" name="Date Placeholder 2"/>
+          <p:cNvSpPr>
+            <a:spLocks noGrp="1"/>
+          </p:cNvSpPr>
+          <p:nvPr>
+            <p:ph type="dt" idx="1"/>
+          </p:nvPr>
+        </p:nvSpPr>
+        <p:spPr>
+          <a:xfrm>
+            <a:off x="3884613" y="0"/>
+            <a:ext cx="2971800" cy="457200"/>
+          </a:xfrm>
+          <a:prstGeom prst="rect">
+            <a:avLst/>
+          </a:prstGeom>
+        </p:spPr>
+        <p:txBody>
+          <a:bodyPr vert="horz" lIns="91440" tIns="45720" rIns="91440" bIns="45720" rtlCol="0"/>
+          <a:lstStyle>
+            <a:lvl1pPr algn="r">
+              <a:defRPr sz="1200"/>
+            </a:lvl1pPr>
+          </a:lstStyle>
+          <a:p>
+            <a:fld id="{0F89C1C7-3DCD-1040-A9CF-14679D8B5DDD}" type="datetimeFigureOut">
+              <a:rPr lang="en-US" smtClean="0"/>
+              <a:t>10/17/16</a:t>
+            </a:fld>
+            <a:endParaRPr lang="en-US"/>
+          </a:p>
+        </p:txBody>
+      </p:sp>
+      <p:sp>
+        <p:nvSpPr>
+          <p:cNvPr id="4" name="Slide Image Placeholder 3"/>
+          <p:cNvSpPr>
+            <a:spLocks noGrp="1" noRot="1" noChangeAspect="1"/>
+          </p:cNvSpPr>
+          <p:nvPr>
+            <p:ph type="sldImg" idx="2"/>
+          </p:nvPr>
+        </p:nvSpPr>
+        <p:spPr>
+          <a:xfrm>
+            <a:off x="1143000" y="685800"/>
+            <a:ext cx="4572000" cy="3429000"/>
+          </a:xfrm>
+          <a:prstGeom prst="rect">
+            <a:avLst/>
+          </a:prstGeom>
+          <a:noFill/>
+          <a:ln w="12700">
+            <a:solidFill>
+              <a:prstClr val="black"/>
+            </a:solidFill>
+          </a:ln>
+        </p:spPr>
+        <p:txBody>
+          <a:bodyPr vert="horz" lIns="91440" tIns="45720" rIns="91440" bIns="45720" rtlCol="0" anchor="ctr"/>
+          <a:lstStyle/>
+          <a:p>
+            <a:endParaRPr lang="en-US"/>
+          </a:p>
+        </p:txBody>
+      </p:sp>
+      <p:sp>
+        <p:nvSpPr>
+          <p:cNvPr id="5" name="Notes Placeholder 4"/>
+          <p:cNvSpPr>
+            <a:spLocks noGrp="1"/>
+          </p:cNvSpPr>
+          <p:nvPr>
+            <p:ph type="body" sz="quarter" idx="3"/>
+          </p:nvPr>
+        </p:nvSpPr>
+        <p:spPr>
+          <a:xfrm>
+            <a:off x="685800" y="4343400"/>
+            <a:ext cx="5486400" cy="4114800"/>
+          </a:xfrm>
+          <a:prstGeom prst="rect">
+            <a:avLst/>
+          </a:prstGeom>
+        </p:spPr>
+        <p:txBody>
+          <a:bodyPr vert="horz" lIns="91440" tIns="45720" rIns="91440" bIns="45720" rtlCol="0"/>
+          <a:lstStyle/>
+          <a:p>
+            <a:pPr lvl="0"/>
+            <a:r>
+              <a:rPr lang="en-US" smtClean="0"/>
+              <a:t>Click to edit Master text styles</a:t>
+            </a:r>
+          </a:p>
+          <a:p>
+            <a:pPr lvl="1"/>
+            <a:r>
+              <a:rPr lang="en-US" smtClean="0"/>
+              <a:t>Second level</a:t>
+            </a:r>
+          </a:p>
+          <a:p>
+            <a:pPr lvl="2"/>
+            <a:r>
+              <a:rPr lang="en-US" smtClean="0"/>
+              <a:t>Third level</a:t>
+            </a:r>
+          </a:p>
+          <a:p>
+            <a:pPr lvl="3"/>
+            <a:r>
+              <a:rPr lang="en-US" smtClean="0"/>
+              <a:t>Fourth level</a:t>
+            </a:r>
+          </a:p>
+          <a:p>
+            <a:pPr lvl="4"/>
+            <a:r>
+              <a:rPr lang="en-US" smtClean="0"/>
+              <a:t>Fifth level</a:t>
+            </a:r>
+            <a:endParaRPr lang="en-US"/>
+          </a:p>
+        </p:txBody>
+      </p:sp>
+      <p:sp>
+        <p:nvSpPr>
+          <p:cNvPr id="6" name="Footer Placeholder 5"/>
+          <p:cNvSpPr>
+            <a:spLocks noGrp="1"/>
+          </p:cNvSpPr>
+          <p:nvPr>
+            <p:ph type="ftr" sz="quarter" idx="4"/>
+          </p:nvPr>
+        </p:nvSpPr>
+        <p:spPr>
+          <a:xfrm>
+            <a:off x="0" y="8685213"/>
+            <a:ext cx="2971800" cy="457200"/>
+          </a:xfrm>
+          <a:prstGeom prst="rect">
+            <a:avLst/>
+          </a:prstGeom>
+        </p:spPr>
+        <p:txBody>
+          <a:bodyPr vert="horz" lIns="91440" tIns="45720" rIns="91440" bIns="45720" rtlCol="0" anchor="b"/>
+          <a:lstStyle>
+            <a:lvl1pPr algn="l">
+              <a:defRPr sz="1200"/>
+            </a:lvl1pPr>
+          </a:lstStyle>
+          <a:p>
+            <a:endParaRPr lang="en-US"/>
+          </a:p>
+        </p:txBody>
+      </p:sp>
+      <p:sp>
+        <p:nvSpPr>
+          <p:cNvPr id="7" name="Slide Number Placeholder 6"/>
+          <p:cNvSpPr>
+            <a:spLocks noGrp="1"/>
+          </p:cNvSpPr>
+          <p:nvPr>
+            <p:ph type="sldNum" sz="quarter" idx="5"/>
+          </p:nvPr>
+        </p:nvSpPr>
+        <p:spPr>
+          <a:xfrm>
+            <a:off x="3884613" y="8685213"/>
+            <a:ext cx="2971800" cy="457200"/>
+          </a:xfrm>
+          <a:prstGeom prst="rect">
+            <a:avLst/>
+          </a:prstGeom>
+        </p:spPr>
+        <p:txBody>
+          <a:bodyPr vert="horz" lIns="91440" tIns="45720" rIns="91440" bIns="45720" rtlCol="0" anchor="b"/>
+          <a:lstStyle>
+            <a:lvl1pPr algn="r">
+              <a:defRPr sz="1200"/>
+            </a:lvl1pPr>
+          </a:lstStyle>
+          <a:p>
+            <a:fld id="{BB5E49A5-4136-284D-997B-48E1D791AD67}" type="slidenum">
+              <a:rPr lang="en-US" smtClean="0"/>
+              <a:t>‹#›</a:t>
+            </a:fld>
+            <a:endParaRPr lang="en-US"/>
+          </a:p>
+        </p:txBody>
+      </p:sp>
+    </p:spTree>
+    <p:extLst>
+      <p:ext uri="{BB962C8B-B14F-4D97-AF65-F5344CB8AC3E}">
+        <p14:creationId xmlns:p14="http://schemas.microsoft.com/office/powerpoint/2010/main" val="2623252185"/>
+      </p:ext>
+    </p:extLst>
+  </p:cSld>
+  <p:clrMap bg1="lt1" tx1="dk1" bg2="lt2" tx2="dk2" accent1="accent1" accent2="accent2" accent3="accent3" accent4="accent4" accent5="accent5" accent6="accent6" hlink="hlink" folHlink="folHlink"/>
+  <p:notesStyle>
+    <a:lvl1pPr marL="0" algn="l" defTabSz="457200" rtl="0" eaLnBrk="1" latinLnBrk="0" hangingPunct="1">
+      <a:defRPr sz="1200" kern="1200">
+        <a:solidFill>
+          <a:schemeClr val="tx1"/>
+        </a:solidFill>
+        <a:latin typeface="+mn-lt"/>
+        <a:ea typeface="+mn-ea"/>
+        <a:cs typeface="+mn-cs"/>
+      </a:defRPr>
+    </a:lvl1pPr>
+    <a:lvl2pPr marL="457200" algn="l" defTabSz="457200" rtl="0" eaLnBrk="1" latinLnBrk="0" hangingPunct="1">
+      <a:defRPr sz="1200" kern="1200">
+        <a:solidFill>
+          <a:schemeClr val="tx1"/>
+        </a:solidFill>
+        <a:latin typeface="+mn-lt"/>
+        <a:ea typeface="+mn-ea"/>
+        <a:cs typeface="+mn-cs"/>
+      </a:defRPr>
+    </a:lvl2pPr>
+    <a:lvl3pPr marL="914400" algn="l" defTabSz="457200" rtl="0" eaLnBrk="1" latinLnBrk="0" hangingPunct="1">
+      <a:defRPr sz="1200" kern="1200">
+        <a:solidFill>
+          <a:schemeClr val="tx1"/>
+        </a:solidFill>
+        <a:latin typeface="+mn-lt"/>
+        <a:ea typeface="+mn-ea"/>
+        <a:cs typeface="+mn-cs"/>
+      </a:defRPr>
+    </a:lvl3pPr>
+    <a:lvl4pPr marL="1371600" algn="l" defTabSz="457200" rtl="0" eaLnBrk="1" latinLnBrk="0" hangingPunct="1">
+      <a:defRPr sz="1200" kern="1200">
+        <a:solidFill>
+          <a:schemeClr val="tx1"/>
+        </a:solidFill>
+        <a:latin typeface="+mn-lt"/>
+        <a:ea typeface="+mn-ea"/>
+        <a:cs typeface="+mn-cs"/>
+      </a:defRPr>
+    </a:lvl4pPr>
+    <a:lvl5pPr marL="1828800" algn="l" defTabSz="457200" rtl="0" eaLnBrk="1" latinLnBrk="0" hangingPunct="1">
+      <a:defRPr sz="1200" kern="1200">
+        <a:solidFill>
+          <a:schemeClr val="tx1"/>
+        </a:solidFill>
+        <a:latin typeface="+mn-lt"/>
+        <a:ea typeface="+mn-ea"/>
+        <a:cs typeface="+mn-cs"/>
+      </a:defRPr>
+    </a:lvl5pPr>
+    <a:lvl6pPr marL="2286000" algn="l" defTabSz="457200" rtl="0" eaLnBrk="1" latinLnBrk="0" hangingPunct="1">
+      <a:defRPr sz="1200" kern="1200">
+        <a:solidFill>
+          <a:schemeClr val="tx1"/>
+        </a:solidFill>
+        <a:latin typeface="+mn-lt"/>
+        <a:ea typeface="+mn-ea"/>
+        <a:cs typeface="+mn-cs"/>
+      </a:defRPr>
+    </a:lvl6pPr>
+    <a:lvl7pPr marL="2743200" algn="l" defTabSz="457200" rtl="0" eaLnBrk="1" latinLnBrk="0" hangingPunct="1">
+      <a:defRPr sz="1200" kern="1200">
+        <a:solidFill>
+          <a:schemeClr val="tx1"/>
+        </a:solidFill>
+        <a:latin typeface="+mn-lt"/>
+        <a:ea typeface="+mn-ea"/>
+        <a:cs typeface="+mn-cs"/>
+      </a:defRPr>
+    </a:lvl7pPr>
+    <a:lvl8pPr marL="3200400" algn="l" defTabSz="457200" rtl="0" eaLnBrk="1" latinLnBrk="0" hangingPunct="1">
+      <a:defRPr sz="1200" kern="1200">
+        <a:solidFill>
+          <a:schemeClr val="tx1"/>
+        </a:solidFill>
+        <a:latin typeface="+mn-lt"/>
+        <a:ea typeface="+mn-ea"/>
+        <a:cs typeface="+mn-cs"/>
+      </a:defRPr>
+    </a:lvl8pPr>
+    <a:lvl9pPr marL="3657600" algn="l" defTabSz="457200" rtl="0" eaLnBrk="1" latinLnBrk="0" hangingPunct="1">
+      <a:defRPr sz="1200" kern="1200">
+        <a:solidFill>
+          <a:schemeClr val="tx1"/>
+        </a:solidFill>
+        <a:latin typeface="+mn-lt"/>
+        <a:ea typeface="+mn-ea"/>
+        <a:cs typeface="+mn-cs"/>
+      </a:defRPr>
+    </a:lvl9pPr>
+  </p:notesStyle>
+</p:notesMaster>
+</file>
+
+<file path=ppt/notesSlides/notesSlide1.xml><?xml version="1.0" encoding="utf-8"?>
+<p:notes xmlns:a="http://schemas.openxmlformats.org/drawingml/2006/main" xmlns:p="http://schemas.openxmlformats.org/presentationml/2006/main" xmlns:r="http://schemas.openxmlformats.org/officeDocument/2006/relationships">
+  <p:cSld>
+    <p:spTree>
+      <p:nvGrpSpPr>
+        <p:cNvPr id="1" name=""/>
+        <p:cNvGrpSpPr/>
+        <p:nvPr/>
+      </p:nvGrpSpPr>
+      <p:grpSpPr>
+        <a:xfrm>
+          <a:off x="0" y="0"/>
+          <a:ext cx="0" cy="0"/>
+          <a:chOff x="0" y="0"/>
+          <a:chExt cx="0" cy="0"/>
+        </a:xfrm>
+      </p:grpSpPr>
+      <p:sp>
+        <p:nvSpPr>
+          <p:cNvPr id="2" name="Slide Image Placeholder 1"/>
+          <p:cNvSpPr>
+            <a:spLocks noGrp="1"/>
+          </p:cNvSpPr>
+          <p:nvPr>
+            <p:ph type="sldImg" idx="2"/>
+          </p:nvPr>
+        </p:nvSpPr>
+        <p:spPr/>
+      </p:sp>
+      <p:sp>
+        <p:nvSpPr>
+          <p:cNvPr id="3" name="Notes Placeholder 2"/>
+          <p:cNvSpPr>
+            <a:spLocks noGrp="1"/>
+          </p:cNvSpPr>
+          <p:nvPr>
+            <p:ph type="body" idx="3" sz="quarter"/>
+          </p:nvPr>
+        </p:nvSpPr>
+        <p:spPr/>
+        <p:txBody>
+          <a:bodyPr/>
+          <a:lstStyle/>
+          <a:p>
+            <a:r>
+              <a:t>Setting: financial ledger with a mis-keyed amount</a:t>
+            </a:r>
+          </a:p>
+          <a:p>
+            <a:r>
+              <a:t>Key idea: one extra zero shifts monthly revenue by 10×</a:t>
+            </a:r>
+          </a:p>
+          <a:p>
+            <a:r>
+              <a:t>Accuracy failures distort aggregates and forecasts</a:t>
+            </a:r>
+          </a:p>
+        </p:txBody>
+      </p:sp>
+      <p:sp>
+        <p:nvSpPr>
+          <p:cNvPr id="4" name="Slide Number Placeholder 3"/>
+          <p:cNvSpPr>
+            <a:spLocks noGrp="1"/>
+          </p:cNvSpPr>
+          <p:nvPr>
+            <p:ph type="sldNum" idx="5" sz="quarter"/>
+          </p:nvPr>
+        </p:nvSpPr>
+        <p:spPr/>
+      </p:sp>
+    </p:spTree>
+  </p:cSld>
+  <p:clrMapOvr>
+    <a:masterClrMapping/>
+  </p:clrMapOvr>
+</p:notes>
+</file>
+
+<file path=ppt/notesSlides/notesSlide2.xml><?xml version="1.0" encoding="utf-8"?>
+<p:notes xmlns:a="http://schemas.openxmlformats.org/drawingml/2006/main" xmlns:p="http://schemas.openxmlformats.org/presentationml/2006/main" xmlns:r="http://schemas.openxmlformats.org/officeDocument/2006/relationships">
+  <p:cSld>
+    <p:spTree>
+      <p:nvGrpSpPr>
+        <p:cNvPr id="1" name=""/>
+        <p:cNvGrpSpPr/>
+        <p:nvPr/>
+      </p:nvGrpSpPr>
+      <p:grpSpPr>
+        <a:xfrm>
+          <a:off x="0" y="0"/>
+          <a:ext cx="0" cy="0"/>
+          <a:chOff x="0" y="0"/>
+          <a:chExt cx="0" cy="0"/>
+        </a:xfrm>
+      </p:grpSpPr>
+      <p:sp>
+        <p:nvSpPr>
+          <p:cNvPr id="2" name="Slide Image Placeholder 1"/>
+          <p:cNvSpPr>
+            <a:spLocks noGrp="1"/>
+          </p:cNvSpPr>
+          <p:nvPr>
+            <p:ph type="sldImg" idx="2"/>
+          </p:nvPr>
+        </p:nvSpPr>
+        <p:spPr/>
+      </p:sp>
+      <p:sp>
+        <p:nvSpPr>
+          <p:cNvPr id="3" name="Notes Placeholder 2"/>
+          <p:cNvSpPr>
+            <a:spLocks noGrp="1"/>
+          </p:cNvSpPr>
+          <p:nvPr>
+            <p:ph type="body" idx="3" sz="quarter"/>
+          </p:nvPr>
+        </p:nvSpPr>
+        <p:spPr/>
+        <p:txBody>
+          <a:bodyPr/>
+          <a:lstStyle/>
+          <a:p>
+            <a:r>
+              <a:t>Metadata: who, when, schema, units, provenance</a:t>
+            </a:r>
+          </a:p>
+          <a:p>
+            <a:r>
+              <a:t>Documentation: how to interpret and reuse the file</a:t>
+            </a:r>
+          </a:p>
+          <a:p>
+            <a:r>
+              <a:t>Example 1.14: weather dataset metadata fields</a:t>
+            </a:r>
+          </a:p>
+        </p:txBody>
+      </p:sp>
+      <p:sp>
+        <p:nvSpPr>
+          <p:cNvPr id="4" name="Slide Number Placeholder 3"/>
+          <p:cNvSpPr>
+            <a:spLocks noGrp="1"/>
+          </p:cNvSpPr>
+          <p:nvPr>
+            <p:ph type="sldNum" idx="5" sz="quarter"/>
+          </p:nvPr>
+        </p:nvSpPr>
+        <p:spPr/>
+      </p:sp>
+    </p:spTree>
+  </p:cSld>
+  <p:clrMapOvr>
+    <a:masterClrMapping/>
+  </p:clrMapOvr>
+</p:notes>
 </file>
 
 <file path=ppt/slideLayouts/slideLayout1.xml><?xml version="1.0" encoding="utf-8"?>
@@ -3103,8 +3612,8 @@
         </p:nvSpPr>
         <p:spPr>
           <a:xfrm>
-            <a:off x="548640" y="320040"/>
-            <a:ext cx="11064240" cy="914400"/>
+            <a:off x="548640" y="1828800"/>
+            <a:ext cx="11064240" cy="2743200"/>
           </a:xfrm>
           <a:prstGeom prst="rect">
             <a:avLst/>
@@ -3112,16 +3621,46 @@
           <a:noFill/>
         </p:spPr>
         <p:txBody>
-          <a:bodyPr wrap="none">
-            <a:spAutoFit/>
+          <a:bodyPr wrap="square">
+            <a:noAutofit/>
           </a:bodyPr>
           <a:lstStyle/>
           <a:p>
-            <a:pPr>
-              <a:defRPr sz="3200" b="1"/>
+            <a:pPr algn="ctr">
+              <a:lnSpc>
+                <a:spcPts val="2200"/>
+              </a:lnSpc>
+              <a:spcAft>
+                <a:spcPts val="400"/>
+              </a:spcAft>
             </a:pPr>
             <a:r>
+              <a:rPr sz="4000" b="1">
+                <a:solidFill>
+                  <a:srgbClr val="1A1A2E"/>
+                </a:solidFill>
+                <a:latin typeface="Calibri"/>
+              </a:rPr>
               <a:t>Chapter 1 — Characteristics of good datasets</a:t>
+            </a:r>
+          </a:p>
+          <a:p>
+            <a:pPr algn="ctr">
+              <a:lnSpc>
+                <a:spcPts val="2200"/>
+              </a:lnSpc>
+              <a:spcBef>
+                <a:spcPts val="1400"/>
+              </a:spcBef>
+            </a:pPr>
+            <a:r>
+              <a:rPr sz="2600" b="0">
+                <a:solidFill>
+                  <a:srgbClr val="333333"/>
+                </a:solidFill>
+                <a:latin typeface="Calibri"/>
+              </a:rPr>
+              <a:t>Judge quality as a bundle of task-relative dimensions</a:t>
             </a:r>
           </a:p>
         </p:txBody>
@@ -3134,8 +3673,8 @@
         </p:nvSpPr>
         <p:spPr>
           <a:xfrm>
-            <a:off x="731520" y="1280160"/>
-            <a:ext cx="10515600" cy="5029200"/>
+            <a:off x="548640" y="6355080"/>
+            <a:ext cx="11064240" cy="320040"/>
           </a:xfrm>
           <a:prstGeom prst="rect">
             <a:avLst/>
@@ -3144,15 +3683,23 @@
         </p:spPr>
         <p:txBody>
           <a:bodyPr wrap="square">
-            <a:spAutoFit/>
+            <a:noAutofit/>
           </a:bodyPr>
           <a:lstStyle/>
           <a:p>
-            <a:pPr>
-              <a:defRPr sz="2000"/>
+            <a:pPr algn="r">
+              <a:lnSpc>
+                <a:spcPts val="2200"/>
+              </a:lnSpc>
+              <a:defRPr sz="1000" b="0">
+                <a:solidFill>
+                  <a:srgbClr val="666666"/>
+                </a:solidFill>
+                <a:latin typeface="Calibri"/>
+              </a:defRPr>
             </a:pPr>
             <a:r>
-              <a:t>Judge quality as a bundle of task-relative dimensions</a:t>
+              <a:t>Chapter 1 — Characteristics Of Good Datasets</a:t>
             </a:r>
           </a:p>
         </p:txBody>
@@ -3183,8 +3730,8 @@
         </p:nvSpPr>
         <p:spPr>
           <a:xfrm>
-            <a:off x="548640" y="320040"/>
-            <a:ext cx="11064240" cy="914400"/>
+            <a:off x="548640" y="411480"/>
+            <a:ext cx="11064240" cy="777240"/>
           </a:xfrm>
           <a:prstGeom prst="rect">
             <a:avLst/>
@@ -3192,15 +3739,23 @@
           <a:noFill/>
         </p:spPr>
         <p:txBody>
-          <a:bodyPr wrap="none">
-            <a:spAutoFit/>
+          <a:bodyPr wrap="square">
+            <a:noAutofit/>
           </a:bodyPr>
           <a:lstStyle/>
           <a:p>
             <a:pPr>
-              <a:defRPr sz="3200" b="1"/>
+              <a:lnSpc>
+                <a:spcPts val="2200"/>
+              </a:lnSpc>
             </a:pPr>
             <a:r>
+              <a:rPr sz="2800" b="1">
+                <a:solidFill>
+                  <a:srgbClr val="1A1A2E"/>
+                </a:solidFill>
+                <a:latin typeface="Calibri"/>
+              </a:rPr>
               <a:t>Learning objectives</a:t>
             </a:r>
           </a:p>
@@ -3214,8 +3769,8 @@
         </p:nvSpPr>
         <p:spPr>
           <a:xfrm>
-            <a:off x="731520" y="1280160"/>
-            <a:ext cx="10515600" cy="5029200"/>
+            <a:off x="548640" y="1234440"/>
+            <a:ext cx="11064240" cy="4937760"/>
           </a:xfrm>
           <a:prstGeom prst="rect">
             <a:avLst/>
@@ -3224,31 +3779,122 @@
         </p:spPr>
         <p:txBody>
           <a:bodyPr wrap="square">
-            <a:spAutoFit/>
+            <a:noAutofit/>
           </a:bodyPr>
           <a:lstStyle/>
           <a:p>
             <a:pPr>
-              <a:defRPr sz="2000"/>
+              <a:lnSpc>
+                <a:spcPts val="2200"/>
+              </a:lnSpc>
+              <a:spcAft>
+                <a:spcPts val="1000"/>
+              </a:spcAft>
             </a:pPr>
             <a:r>
-              <a:t>List five quality dimensions from the chapter</a:t>
+              <a:rPr sz="2000" b="0">
+                <a:solidFill>
+                  <a:srgbClr val="333333"/>
+                </a:solidFill>
+                <a:latin typeface="Calibri"/>
+              </a:rPr>
+              <a:t>• List five quality dimensions from the chapter</a:t>
             </a:r>
           </a:p>
           <a:p>
             <a:pPr>
-              <a:defRPr sz="2000"/>
+              <a:lnSpc>
+                <a:spcPts val="2200"/>
+              </a:lnSpc>
+              <a:spcAft>
+                <a:spcPts val="1000"/>
+              </a:spcAft>
             </a:pPr>
             <a:r>
-              <a:t>Diagnose accuracy, completeness, and consistency defects</a:t>
+              <a:rPr sz="2000" b="0">
+                <a:solidFill>
+                  <a:srgbClr val="333333"/>
+                </a:solidFill>
+                <a:latin typeface="Calibri"/>
+              </a:rPr>
+              <a:t>• Diagnose accuracy, completeness, and consistency</a:t>
             </a:r>
           </a:p>
           <a:p>
             <a:pPr>
-              <a:defRPr sz="2000"/>
+              <a:lnSpc>
+                <a:spcPts val="2200"/>
+              </a:lnSpc>
+              <a:spcAft>
+                <a:spcPts val="1000"/>
+              </a:spcAft>
             </a:pPr>
             <a:r>
-              <a:t>Explain why metadata and documentation matter</a:t>
+              <a:rPr sz="2000" b="0">
+                <a:solidFill>
+                  <a:srgbClr val="333333"/>
+                </a:solidFill>
+                <a:latin typeface="Calibri"/>
+              </a:rPr>
+              <a:t>      defects</a:t>
+            </a:r>
+          </a:p>
+          <a:p>
+            <a:pPr>
+              <a:lnSpc>
+                <a:spcPts val="2200"/>
+              </a:lnSpc>
+              <a:spcAft>
+                <a:spcPts val="1000"/>
+              </a:spcAft>
+            </a:pPr>
+            <a:r>
+              <a:rPr sz="2000" b="0">
+                <a:solidFill>
+                  <a:srgbClr val="333333"/>
+                </a:solidFill>
+                <a:latin typeface="Calibri"/>
+              </a:rPr>
+              <a:t>• Explain why metadata and documentation matter</a:t>
+            </a:r>
+          </a:p>
+        </p:txBody>
+      </p:sp>
+      <p:sp>
+        <p:nvSpPr>
+          <p:cNvPr id="4" name="TextBox 3"/>
+          <p:cNvSpPr txBox="1"/>
+          <p:nvPr/>
+        </p:nvSpPr>
+        <p:spPr>
+          <a:xfrm>
+            <a:off x="548640" y="6355080"/>
+            <a:ext cx="11064240" cy="320040"/>
+          </a:xfrm>
+          <a:prstGeom prst="rect">
+            <a:avLst/>
+          </a:prstGeom>
+          <a:noFill/>
+        </p:spPr>
+        <p:txBody>
+          <a:bodyPr wrap="square">
+            <a:noAutofit/>
+          </a:bodyPr>
+          <a:lstStyle/>
+          <a:p>
+            <a:pPr algn="r">
+              <a:lnSpc>
+                <a:spcPts val="2200"/>
+              </a:lnSpc>
+              <a:defRPr sz="1000" b="0">
+                <a:solidFill>
+                  <a:srgbClr val="666666"/>
+                </a:solidFill>
+                <a:latin typeface="Calibri"/>
+              </a:defRPr>
+            </a:pPr>
+            <a:r>
+              <a:t>Chapter 1 — Characteristics Of Good Datasets</a:t>
             </a:r>
           </a:p>
         </p:txBody>
@@ -3279,8 +3925,8 @@
         </p:nvSpPr>
         <p:spPr>
           <a:xfrm>
-            <a:off x="548640" y="320040"/>
-            <a:ext cx="11064240" cy="914400"/>
+            <a:off x="548640" y="411480"/>
+            <a:ext cx="11064240" cy="777240"/>
           </a:xfrm>
           <a:prstGeom prst="rect">
             <a:avLst/>
@@ -3288,15 +3934,23 @@
           <a:noFill/>
         </p:spPr>
         <p:txBody>
-          <a:bodyPr wrap="none">
-            <a:spAutoFit/>
+          <a:bodyPr wrap="square">
+            <a:noAutofit/>
           </a:bodyPr>
           <a:lstStyle/>
           <a:p>
             <a:pPr>
-              <a:defRPr sz="3200" b="1"/>
+              <a:lnSpc>
+                <a:spcPts val="2200"/>
+              </a:lnSpc>
             </a:pPr>
             <a:r>
+              <a:rPr sz="2800" b="1">
+                <a:solidFill>
+                  <a:srgbClr val="1A1A2E"/>
+                </a:solidFill>
+                <a:latin typeface="Calibri"/>
+              </a:rPr>
               <a:t>Five quality dimensions</a:t>
             </a:r>
           </a:p>
@@ -3310,8 +3964,8 @@
         </p:nvSpPr>
         <p:spPr>
           <a:xfrm>
-            <a:off x="731520" y="1280160"/>
-            <a:ext cx="10515600" cy="5029200"/>
+            <a:off x="548640" y="1234440"/>
+            <a:ext cx="11064240" cy="4937760"/>
           </a:xfrm>
           <a:prstGeom prst="rect">
             <a:avLst/>
@@ -3320,47 +3974,269 @@
         </p:spPr>
         <p:txBody>
           <a:bodyPr wrap="square">
-            <a:spAutoFit/>
+            <a:noAutofit/>
           </a:bodyPr>
           <a:lstStyle/>
           <a:p>
             <a:pPr>
-              <a:defRPr sz="2000"/>
+              <a:lnSpc>
+                <a:spcPts val="2200"/>
+              </a:lnSpc>
+              <a:spcAft>
+                <a:spcPts val="1000"/>
+              </a:spcAft>
             </a:pPr>
             <a:r>
-              <a:t>**Accuracy** — values reflect ground truth closely enough</a:t>
+              <a:rPr sz="2000" b="0">
+                <a:solidFill>
+                  <a:srgbClr val="333333"/>
+                </a:solidFill>
+                <a:latin typeface="Calibri"/>
+              </a:rPr>
+              <a:t>• </a:t>
+            </a:r>
+            <a:r>
+              <a:rPr sz="2000" b="1">
+                <a:solidFill>
+                  <a:srgbClr val="333333"/>
+                </a:solidFill>
+                <a:latin typeface="Calibri"/>
+              </a:rPr>
+              <a:t>Accuracy</a:t>
+            </a:r>
+            <a:r>
+              <a:rPr sz="2000" b="0">
+                <a:solidFill>
+                  <a:srgbClr val="333333"/>
+                </a:solidFill>
+                <a:latin typeface="Calibri"/>
+              </a:rPr>
+              <a:t> — values reflect ground truth closely</a:t>
             </a:r>
           </a:p>
           <a:p>
             <a:pPr>
-              <a:defRPr sz="2000"/>
+              <a:lnSpc>
+                <a:spcPts val="2200"/>
+              </a:lnSpc>
+              <a:spcAft>
+                <a:spcPts val="1000"/>
+              </a:spcAft>
             </a:pPr>
             <a:r>
-              <a:t>**Completeness** — needed records and attributes are present</a:t>
+              <a:rPr sz="2000" b="0">
+                <a:solidFill>
+                  <a:srgbClr val="333333"/>
+                </a:solidFill>
+                <a:latin typeface="Calibri"/>
+              </a:rPr>
+              <a:t>      enough</a:t>
             </a:r>
           </a:p>
           <a:p>
             <a:pPr>
-              <a:defRPr sz="2000"/>
+              <a:lnSpc>
+                <a:spcPts val="2200"/>
+              </a:lnSpc>
+              <a:spcAft>
+                <a:spcPts val="1000"/>
+              </a:spcAft>
             </a:pPr>
             <a:r>
-              <a:t>**Consistency** — uniform formats, units, definitions</a:t>
+              <a:rPr sz="2000" b="0">
+                <a:solidFill>
+                  <a:srgbClr val="333333"/>
+                </a:solidFill>
+                <a:latin typeface="Calibri"/>
+              </a:rPr>
+              <a:t>• </a:t>
+            </a:r>
+            <a:r>
+              <a:rPr sz="2000" b="1">
+                <a:solidFill>
+                  <a:srgbClr val="333333"/>
+                </a:solidFill>
+                <a:latin typeface="Calibri"/>
+              </a:rPr>
+              <a:t>Completeness</a:t>
+            </a:r>
+            <a:r>
+              <a:rPr sz="2000" b="0">
+                <a:solidFill>
+                  <a:srgbClr val="333333"/>
+                </a:solidFill>
+                <a:latin typeface="Calibri"/>
+              </a:rPr>
+              <a:t> — needed records and attributes are</a:t>
             </a:r>
           </a:p>
           <a:p>
             <a:pPr>
-              <a:defRPr sz="2000"/>
+              <a:lnSpc>
+                <a:spcPts val="2200"/>
+              </a:lnSpc>
+              <a:spcAft>
+                <a:spcPts val="1000"/>
+              </a:spcAft>
             </a:pPr>
             <a:r>
-              <a:t>**Relevance** — data answers the intended question</a:t>
+              <a:rPr sz="2000" b="0">
+                <a:solidFill>
+                  <a:srgbClr val="333333"/>
+                </a:solidFill>
+                <a:latin typeface="Calibri"/>
+              </a:rPr>
+              <a:t>      present</a:t>
             </a:r>
           </a:p>
           <a:p>
             <a:pPr>
-              <a:defRPr sz="2000"/>
+              <a:lnSpc>
+                <a:spcPts val="2200"/>
+              </a:lnSpc>
+              <a:spcAft>
+                <a:spcPts val="1000"/>
+              </a:spcAft>
             </a:pPr>
             <a:r>
-              <a:t>**Timeliness** — data is sufficiently up to date</a:t>
+              <a:rPr sz="2000" b="0">
+                <a:solidFill>
+                  <a:srgbClr val="333333"/>
+                </a:solidFill>
+                <a:latin typeface="Calibri"/>
+              </a:rPr>
+              <a:t>• </a:t>
+            </a:r>
+            <a:r>
+              <a:rPr sz="2000" b="1">
+                <a:solidFill>
+                  <a:srgbClr val="333333"/>
+                </a:solidFill>
+                <a:latin typeface="Calibri"/>
+              </a:rPr>
+              <a:t>Consistency</a:t>
+            </a:r>
+            <a:r>
+              <a:rPr sz="2000" b="0">
+                <a:solidFill>
+                  <a:srgbClr val="333333"/>
+                </a:solidFill>
+                <a:latin typeface="Calibri"/>
+              </a:rPr>
+              <a:t> — uniform formats, units, definitions</a:t>
+            </a:r>
+          </a:p>
+          <a:p>
+            <a:pPr>
+              <a:lnSpc>
+                <a:spcPts val="2200"/>
+              </a:lnSpc>
+              <a:spcAft>
+                <a:spcPts val="1000"/>
+              </a:spcAft>
+            </a:pPr>
+            <a:r>
+              <a:rPr sz="2000" b="0">
+                <a:solidFill>
+                  <a:srgbClr val="333333"/>
+                </a:solidFill>
+                <a:latin typeface="Calibri"/>
+              </a:rPr>
+              <a:t>• </a:t>
+            </a:r>
+            <a:r>
+              <a:rPr sz="2000" b="1">
+                <a:solidFill>
+                  <a:srgbClr val="333333"/>
+                </a:solidFill>
+                <a:latin typeface="Calibri"/>
+              </a:rPr>
+              <a:t>Relevance</a:t>
+            </a:r>
+            <a:r>
+              <a:rPr sz="2000" b="0">
+                <a:solidFill>
+                  <a:srgbClr val="333333"/>
+                </a:solidFill>
+                <a:latin typeface="Calibri"/>
+              </a:rPr>
+              <a:t> — data answers the intended question</a:t>
+            </a:r>
+          </a:p>
+          <a:p>
+            <a:pPr>
+              <a:lnSpc>
+                <a:spcPts val="2200"/>
+              </a:lnSpc>
+              <a:spcAft>
+                <a:spcPts val="1000"/>
+              </a:spcAft>
+            </a:pPr>
+            <a:r>
+              <a:rPr sz="2000" b="0">
+                <a:solidFill>
+                  <a:srgbClr val="333333"/>
+                </a:solidFill>
+                <a:latin typeface="Calibri"/>
+              </a:rPr>
+              <a:t>• </a:t>
+            </a:r>
+            <a:r>
+              <a:rPr sz="2000" b="1">
+                <a:solidFill>
+                  <a:srgbClr val="333333"/>
+                </a:solidFill>
+                <a:latin typeface="Calibri"/>
+              </a:rPr>
+              <a:t>Timeliness</a:t>
+            </a:r>
+            <a:r>
+              <a:rPr sz="2000" b="0">
+                <a:solidFill>
+                  <a:srgbClr val="333333"/>
+                </a:solidFill>
+                <a:latin typeface="Calibri"/>
+              </a:rPr>
+              <a:t> — data is sufficiently up to date</a:t>
+            </a:r>
+          </a:p>
+        </p:txBody>
+      </p:sp>
+      <p:sp>
+        <p:nvSpPr>
+          <p:cNvPr id="4" name="TextBox 3"/>
+          <p:cNvSpPr txBox="1"/>
+          <p:nvPr/>
+        </p:nvSpPr>
+        <p:spPr>
+          <a:xfrm>
+            <a:off x="548640" y="6355080"/>
+            <a:ext cx="11064240" cy="320040"/>
+          </a:xfrm>
+          <a:prstGeom prst="rect">
+            <a:avLst/>
+          </a:prstGeom>
+          <a:noFill/>
+        </p:spPr>
+        <p:txBody>
+          <a:bodyPr wrap="square">
+            <a:noAutofit/>
+          </a:bodyPr>
+          <a:lstStyle/>
+          <a:p>
+            <a:pPr algn="r">
+              <a:lnSpc>
+                <a:spcPts val="2200"/>
+              </a:lnSpc>
+              <a:defRPr sz="1000" b="0">
+                <a:solidFill>
+                  <a:srgbClr val="666666"/>
+                </a:solidFill>
+                <a:latin typeface="Calibri"/>
+              </a:defRPr>
+            </a:pPr>
+            <a:r>
+              <a:t>Chapter 1 — Characteristics Of Good Datasets</a:t>
             </a:r>
           </a:p>
         </p:txBody>
@@ -3391,8 +4267,8 @@
         </p:nvSpPr>
         <p:spPr>
           <a:xfrm>
-            <a:off x="548640" y="320040"/>
-            <a:ext cx="11064240" cy="914400"/>
+            <a:off x="548640" y="411480"/>
+            <a:ext cx="11064240" cy="777240"/>
           </a:xfrm>
           <a:prstGeom prst="rect">
             <a:avLst/>
@@ -3400,15 +4276,23 @@
           <a:noFill/>
         </p:spPr>
         <p:txBody>
-          <a:bodyPr wrap="none">
-            <a:spAutoFit/>
+          <a:bodyPr wrap="square">
+            <a:noAutofit/>
           </a:bodyPr>
           <a:lstStyle/>
           <a:p>
             <a:pPr>
-              <a:defRPr sz="3200" b="1"/>
+              <a:lnSpc>
+                <a:spcPts val="2200"/>
+              </a:lnSpc>
             </a:pPr>
             <a:r>
+              <a:rPr sz="2800" b="1">
+                <a:solidFill>
+                  <a:srgbClr val="1A1A2E"/>
+                </a:solidFill>
+                <a:latin typeface="Calibri"/>
+              </a:rPr>
               <a:t>Example 1.11 — Incorrect transaction</a:t>
             </a:r>
           </a:p>
@@ -3422,8 +4306,52 @@
         </p:nvSpPr>
         <p:spPr>
           <a:xfrm>
-            <a:off x="731520" y="1280160"/>
-            <a:ext cx="10515600" cy="5029200"/>
+            <a:off x="548640" y="1051560"/>
+            <a:ext cx="11064240" cy="914400"/>
+          </a:xfrm>
+          <a:prstGeom prst="rect">
+            <a:avLst/>
+          </a:prstGeom>
+          <a:solidFill>
+            <a:srgbClr val="F4F4F4"/>
+          </a:solidFill>
+        </p:spPr>
+        <p:txBody>
+          <a:bodyPr wrap="square">
+            <a:noAutofit/>
+          </a:bodyPr>
+          <a:lstStyle/>
+          <a:p>
+            <a:pPr>
+              <a:lnSpc>
+                <a:spcPts val="2200"/>
+              </a:lnSpc>
+              <a:spcAft>
+                <a:spcPts val="200"/>
+              </a:spcAft>
+            </a:pPr>
+            <a:r>
+              <a:rPr sz="2000" b="0">
+                <a:solidFill>
+                  <a:srgbClr val="333333"/>
+                </a:solidFill>
+                <a:latin typeface="Consolas"/>
+              </a:rPr>
+              <a:t>$ cd modules/chapter1/example11/ &amp;&amp; bash run.sh</a:t>
+            </a:r>
+          </a:p>
+        </p:txBody>
+      </p:sp>
+      <p:sp>
+        <p:nvSpPr>
+          <p:cNvPr id="4" name="TextBox 3"/>
+          <p:cNvSpPr txBox="1"/>
+          <p:nvPr/>
+        </p:nvSpPr>
+        <p:spPr>
+          <a:xfrm>
+            <a:off x="548640" y="6355080"/>
+            <a:ext cx="11064240" cy="320040"/>
           </a:xfrm>
           <a:prstGeom prst="rect">
             <a:avLst/>
@@ -3432,39 +4360,23 @@
         </p:spPr>
         <p:txBody>
           <a:bodyPr wrap="square">
-            <a:spAutoFit/>
+            <a:noAutofit/>
           </a:bodyPr>
           <a:lstStyle/>
           <a:p>
-            <a:pPr>
-              <a:defRPr sz="2000"/>
+            <a:pPr algn="r">
+              <a:lnSpc>
+                <a:spcPts val="2200"/>
+              </a:lnSpc>
+              <a:defRPr sz="1000" b="0">
+                <a:solidFill>
+                  <a:srgbClr val="666666"/>
+                </a:solidFill>
+                <a:latin typeface="Calibri"/>
+              </a:defRPr>
             </a:pPr>
             <a:r>
-              <a:t>Setting: financial ledger with a mis-keyed amount</a:t>
-            </a:r>
-          </a:p>
-          <a:p>
-            <a:pPr>
-              <a:defRPr sz="2000"/>
-            </a:pPr>
-            <a:r>
-              <a:t>Key idea: one extra zero shifts monthly revenue by 10×</a:t>
-            </a:r>
-          </a:p>
-          <a:p>
-            <a:pPr>
-              <a:defRPr sz="2000"/>
-            </a:pPr>
-            <a:r>
-              <a:t>Accuracy failures distort aggregates and forecasts</a:t>
-            </a:r>
-          </a:p>
-          <a:p>
-            <a:pPr>
-              <a:defRPr sz="2000"/>
-            </a:pPr>
-            <a:r>
-              <a:t>Try it: `modules/chapter1/example11/`</a:t>
+              <a:t>Chapter 1 — Characteristics Of Good Datasets</a:t>
             </a:r>
           </a:p>
         </p:txBody>
@@ -3495,8 +4407,8 @@
         </p:nvSpPr>
         <p:spPr>
           <a:xfrm>
-            <a:off x="548640" y="320040"/>
-            <a:ext cx="11064240" cy="914400"/>
+            <a:off x="548640" y="411480"/>
+            <a:ext cx="11064240" cy="777240"/>
           </a:xfrm>
           <a:prstGeom prst="rect">
             <a:avLst/>
@@ -3504,15 +4416,23 @@
           <a:noFill/>
         </p:spPr>
         <p:txBody>
-          <a:bodyPr wrap="none">
-            <a:spAutoFit/>
+          <a:bodyPr wrap="square">
+            <a:noAutofit/>
           </a:bodyPr>
           <a:lstStyle/>
           <a:p>
             <a:pPr>
-              <a:defRPr sz="3200" b="1"/>
+              <a:lnSpc>
+                <a:spcPts val="2200"/>
+              </a:lnSpc>
             </a:pPr>
             <a:r>
+              <a:rPr sz="2800" b="1">
+                <a:solidFill>
+                  <a:srgbClr val="1A1A2E"/>
+                </a:solidFill>
+                <a:latin typeface="Calibri"/>
+              </a:rPr>
               <a:t>Completeness and consistency</a:t>
             </a:r>
           </a:p>
@@ -3526,8 +4446,8 @@
         </p:nvSpPr>
         <p:spPr>
           <a:xfrm>
-            <a:off x="731520" y="1280160"/>
-            <a:ext cx="10515600" cy="5029200"/>
+            <a:off x="548640" y="1234440"/>
+            <a:ext cx="11064240" cy="4937760"/>
           </a:xfrm>
           <a:prstGeom prst="rect">
             <a:avLst/>
@@ -3536,39 +4456,179 @@
         </p:spPr>
         <p:txBody>
           <a:bodyPr wrap="square">
-            <a:spAutoFit/>
+            <a:noAutofit/>
           </a:bodyPr>
           <a:lstStyle/>
           <a:p>
             <a:pPr>
-              <a:defRPr sz="2000"/>
+              <a:lnSpc>
+                <a:spcPts val="2200"/>
+              </a:lnSpc>
+              <a:spcAft>
+                <a:spcPts val="1000"/>
+              </a:spcAft>
             </a:pPr>
             <a:r>
-              <a:t>Missing age or diagnosis fields bias clinical models (eg:1.12)</a:t>
+              <a:rPr sz="2000" b="0">
+                <a:solidFill>
+                  <a:srgbClr val="333333"/>
+                </a:solidFill>
+                <a:latin typeface="Calibri"/>
+              </a:rPr>
+              <a:t>• Missing age or diagnosis fields bias clinical models</a:t>
             </a:r>
           </a:p>
           <a:p>
             <a:pPr>
-              <a:defRPr sz="2000"/>
+              <a:lnSpc>
+                <a:spcPts val="2200"/>
+              </a:lnSpc>
+              <a:spcAft>
+                <a:spcPts val="1000"/>
+              </a:spcAft>
             </a:pPr>
             <a:r>
-              <a:t>Mixed date formats break chronological sorting (eg:1.13)</a:t>
+              <a:rPr sz="2000" b="0">
+                <a:solidFill>
+                  <a:srgbClr val="333333"/>
+                </a:solidFill>
+                <a:latin typeface="Calibri"/>
+              </a:rPr>
+              <a:t>      (eg:1.12)</a:t>
             </a:r>
           </a:p>
           <a:p>
             <a:pPr>
-              <a:defRPr sz="2000"/>
+              <a:lnSpc>
+                <a:spcPts val="2200"/>
+              </a:lnSpc>
+              <a:spcAft>
+                <a:spcPts val="1000"/>
+              </a:spcAft>
             </a:pPr>
             <a:r>
-              <a:t>Defects interact: complete yet inaccurate still fails the task</a:t>
+              <a:rPr sz="2000" b="0">
+                <a:solidFill>
+                  <a:srgbClr val="333333"/>
+                </a:solidFill>
+                <a:latin typeface="Calibri"/>
+              </a:rPr>
+              <a:t>• Mixed date formats break chronological sorting</a:t>
             </a:r>
           </a:p>
           <a:p>
             <a:pPr>
-              <a:defRPr sz="2000"/>
+              <a:lnSpc>
+                <a:spcPts val="2200"/>
+              </a:lnSpc>
+              <a:spcAft>
+                <a:spcPts val="1000"/>
+              </a:spcAft>
             </a:pPr>
             <a:r>
-              <a:t>Systematic repair is deferred to later chapters</a:t>
+              <a:rPr sz="2000" b="0">
+                <a:solidFill>
+                  <a:srgbClr val="333333"/>
+                </a:solidFill>
+                <a:latin typeface="Calibri"/>
+              </a:rPr>
+              <a:t>      (eg:1.13)</a:t>
+            </a:r>
+          </a:p>
+          <a:p>
+            <a:pPr>
+              <a:lnSpc>
+                <a:spcPts val="2200"/>
+              </a:lnSpc>
+              <a:spcAft>
+                <a:spcPts val="1000"/>
+              </a:spcAft>
+            </a:pPr>
+            <a:r>
+              <a:rPr sz="2000" b="0">
+                <a:solidFill>
+                  <a:srgbClr val="333333"/>
+                </a:solidFill>
+                <a:latin typeface="Calibri"/>
+              </a:rPr>
+              <a:t>• Defects interact: complete yet inaccurate still</a:t>
+            </a:r>
+          </a:p>
+          <a:p>
+            <a:pPr>
+              <a:lnSpc>
+                <a:spcPts val="2200"/>
+              </a:lnSpc>
+              <a:spcAft>
+                <a:spcPts val="1000"/>
+              </a:spcAft>
+            </a:pPr>
+            <a:r>
+              <a:rPr sz="2000" b="0">
+                <a:solidFill>
+                  <a:srgbClr val="333333"/>
+                </a:solidFill>
+                <a:latin typeface="Calibri"/>
+              </a:rPr>
+              <a:t>      fails the task</a:t>
+            </a:r>
+          </a:p>
+          <a:p>
+            <a:pPr>
+              <a:lnSpc>
+                <a:spcPts val="2200"/>
+              </a:lnSpc>
+              <a:spcAft>
+                <a:spcPts val="1000"/>
+              </a:spcAft>
+            </a:pPr>
+            <a:r>
+              <a:rPr sz="2000" b="0">
+                <a:solidFill>
+                  <a:srgbClr val="333333"/>
+                </a:solidFill>
+                <a:latin typeface="Calibri"/>
+              </a:rPr>
+              <a:t>• Systematic repair is deferred to later chapters</a:t>
+            </a:r>
+          </a:p>
+        </p:txBody>
+      </p:sp>
+      <p:sp>
+        <p:nvSpPr>
+          <p:cNvPr id="4" name="TextBox 3"/>
+          <p:cNvSpPr txBox="1"/>
+          <p:nvPr/>
+        </p:nvSpPr>
+        <p:spPr>
+          <a:xfrm>
+            <a:off x="548640" y="6355080"/>
+            <a:ext cx="11064240" cy="320040"/>
+          </a:xfrm>
+          <a:prstGeom prst="rect">
+            <a:avLst/>
+          </a:prstGeom>
+          <a:noFill/>
+        </p:spPr>
+        <p:txBody>
+          <a:bodyPr wrap="square">
+            <a:noAutofit/>
+          </a:bodyPr>
+          <a:lstStyle/>
+          <a:p>
+            <a:pPr algn="r">
+              <a:lnSpc>
+                <a:spcPts val="2200"/>
+              </a:lnSpc>
+              <a:defRPr sz="1000" b="0">
+                <a:solidFill>
+                  <a:srgbClr val="666666"/>
+                </a:solidFill>
+                <a:latin typeface="Calibri"/>
+              </a:defRPr>
+            </a:pPr>
+            <a:r>
+              <a:t>Chapter 1 — Characteristics Of Good Datasets</a:t>
             </a:r>
           </a:p>
         </p:txBody>
@@ -3599,8 +4659,8 @@
         </p:nvSpPr>
         <p:spPr>
           <a:xfrm>
-            <a:off x="548640" y="320040"/>
-            <a:ext cx="11064240" cy="914400"/>
+            <a:off x="548640" y="411480"/>
+            <a:ext cx="11064240" cy="777240"/>
           </a:xfrm>
           <a:prstGeom prst="rect">
             <a:avLst/>
@@ -3608,15 +4668,23 @@
           <a:noFill/>
         </p:spPr>
         <p:txBody>
-          <a:bodyPr wrap="none">
-            <a:spAutoFit/>
+          <a:bodyPr wrap="square">
+            <a:noAutofit/>
           </a:bodyPr>
           <a:lstStyle/>
           <a:p>
             <a:pPr>
-              <a:defRPr sz="3200" b="1"/>
+              <a:lnSpc>
+                <a:spcPts val="2200"/>
+              </a:lnSpc>
             </a:pPr>
             <a:r>
+              <a:rPr sz="2800" b="1">
+                <a:solidFill>
+                  <a:srgbClr val="1A1A2E"/>
+                </a:solidFill>
+                <a:latin typeface="Calibri"/>
+              </a:rPr>
               <a:t>Metadata and documentation</a:t>
             </a:r>
           </a:p>
@@ -3630,8 +4698,52 @@
         </p:nvSpPr>
         <p:spPr>
           <a:xfrm>
-            <a:off x="731520" y="1280160"/>
-            <a:ext cx="10515600" cy="5029200"/>
+            <a:off x="548640" y="1051560"/>
+            <a:ext cx="11064240" cy="914400"/>
+          </a:xfrm>
+          <a:prstGeom prst="rect">
+            <a:avLst/>
+          </a:prstGeom>
+          <a:solidFill>
+            <a:srgbClr val="F4F4F4"/>
+          </a:solidFill>
+        </p:spPr>
+        <p:txBody>
+          <a:bodyPr wrap="square">
+            <a:noAutofit/>
+          </a:bodyPr>
+          <a:lstStyle/>
+          <a:p>
+            <a:pPr>
+              <a:lnSpc>
+                <a:spcPts val="2200"/>
+              </a:lnSpc>
+              <a:spcAft>
+                <a:spcPts val="200"/>
+              </a:spcAft>
+            </a:pPr>
+            <a:r>
+              <a:rPr sz="2000" b="0">
+                <a:solidFill>
+                  <a:srgbClr val="333333"/>
+                </a:solidFill>
+                <a:latin typeface="Consolas"/>
+              </a:rPr>
+              <a:t>$ cd modules/chapter1/example14/ &amp;&amp; bash run.sh</a:t>
+            </a:r>
+          </a:p>
+        </p:txBody>
+      </p:sp>
+      <p:sp>
+        <p:nvSpPr>
+          <p:cNvPr id="4" name="TextBox 3"/>
+          <p:cNvSpPr txBox="1"/>
+          <p:nvPr/>
+        </p:nvSpPr>
+        <p:spPr>
+          <a:xfrm>
+            <a:off x="548640" y="6355080"/>
+            <a:ext cx="11064240" cy="320040"/>
           </a:xfrm>
           <a:prstGeom prst="rect">
             <a:avLst/>
@@ -3640,39 +4752,23 @@
         </p:spPr>
         <p:txBody>
           <a:bodyPr wrap="square">
-            <a:spAutoFit/>
+            <a:noAutofit/>
           </a:bodyPr>
           <a:lstStyle/>
           <a:p>
-            <a:pPr>
-              <a:defRPr sz="2000"/>
+            <a:pPr algn="r">
+              <a:lnSpc>
+                <a:spcPts val="2200"/>
+              </a:lnSpc>
+              <a:defRPr sz="1000" b="0">
+                <a:solidFill>
+                  <a:srgbClr val="666666"/>
+                </a:solidFill>
+                <a:latin typeface="Calibri"/>
+              </a:defRPr>
             </a:pPr>
             <a:r>
-              <a:t>Metadata: who, when, schema, units, provenance</a:t>
-            </a:r>
-          </a:p>
-          <a:p>
-            <a:pPr>
-              <a:defRPr sz="2000"/>
-            </a:pPr>
-            <a:r>
-              <a:t>Documentation: how to interpret and reuse the file</a:t>
-            </a:r>
-          </a:p>
-          <a:p>
-            <a:pPr>
-              <a:defRPr sz="2000"/>
-            </a:pPr>
-            <a:r>
-              <a:t>Example 1.14: weather dataset metadata fields</a:t>
-            </a:r>
-          </a:p>
-          <a:p>
-            <a:pPr>
-              <a:defRPr sz="2000"/>
-            </a:pPr>
-            <a:r>
-              <a:t>Try it: `modules/chapter1/example14/`</a:t>
+              <a:t>Chapter 1 — Characteristics Of Good Datasets</a:t>
             </a:r>
           </a:p>
         </p:txBody>
@@ -3703,8 +4799,8 @@
         </p:nvSpPr>
         <p:spPr>
           <a:xfrm>
-            <a:off x="548640" y="320040"/>
-            <a:ext cx="11064240" cy="914400"/>
+            <a:off x="548640" y="411480"/>
+            <a:ext cx="11064240" cy="777240"/>
           </a:xfrm>
           <a:prstGeom prst="rect">
             <a:avLst/>
@@ -3712,15 +4808,23 @@
           <a:noFill/>
         </p:spPr>
         <p:txBody>
-          <a:bodyPr wrap="none">
-            <a:spAutoFit/>
+          <a:bodyPr wrap="square">
+            <a:noAutofit/>
           </a:bodyPr>
           <a:lstStyle/>
           <a:p>
             <a:pPr>
-              <a:defRPr sz="3200" b="1"/>
+              <a:lnSpc>
+                <a:spcPts val="2200"/>
+              </a:lnSpc>
             </a:pPr>
             <a:r>
+              <a:rPr sz="2800" b="1">
+                <a:solidFill>
+                  <a:srgbClr val="1A1A2E"/>
+                </a:solidFill>
+                <a:latin typeface="Calibri"/>
+              </a:rPr>
               <a:t>Takeaways</a:t>
             </a:r>
           </a:p>
@@ -3734,8 +4838,8 @@
         </p:nvSpPr>
         <p:spPr>
           <a:xfrm>
-            <a:off x="731520" y="1280160"/>
-            <a:ext cx="10515600" cy="5029200"/>
+            <a:off x="548640" y="1234440"/>
+            <a:ext cx="11064240" cy="4937760"/>
           </a:xfrm>
           <a:prstGeom prst="rect">
             <a:avLst/>
@@ -3744,63 +4848,97 @@
         </p:spPr>
         <p:txBody>
           <a:bodyPr wrap="square">
-            <a:spAutoFit/>
+            <a:noAutofit/>
           </a:bodyPr>
           <a:lstStyle/>
           <a:p>
             <a:pPr>
-              <a:defRPr sz="2000"/>
+              <a:lnSpc>
+                <a:spcPts val="2200"/>
+              </a:lnSpc>
+              <a:spcAft>
+                <a:spcPts val="1000"/>
+              </a:spcAft>
             </a:pPr>
             <a:r>
-              <a:t>Quality is multi-dimensional and task-relative</a:t>
+              <a:rPr sz="2000" b="0">
+                <a:solidFill>
+                  <a:srgbClr val="333333"/>
+                </a:solidFill>
+                <a:latin typeface="Calibri"/>
+              </a:rPr>
+              <a:t>• Quality is multi-dimensional and task-relative</a:t>
             </a:r>
           </a:p>
           <a:p>
             <a:pPr>
-              <a:defRPr sz="2000"/>
+              <a:lnSpc>
+                <a:spcPts val="2200"/>
+              </a:lnSpc>
+              <a:spcAft>
+                <a:spcPts val="1000"/>
+              </a:spcAft>
             </a:pPr>
             <a:r>
-              <a:t>Spot accuracy, missingness, and format clashes early</a:t>
+              <a:rPr sz="2000" b="0">
+                <a:solidFill>
+                  <a:srgbClr val="333333"/>
+                </a:solidFill>
+                <a:latin typeface="Calibri"/>
+              </a:rPr>
+              <a:t>• Spot accuracy, missingness, and format clashes early</a:t>
             </a:r>
           </a:p>
           <a:p>
             <a:pPr>
-              <a:defRPr sz="2000"/>
+              <a:lnSpc>
+                <a:spcPts val="2200"/>
+              </a:lnSpc>
+              <a:spcAft>
+                <a:spcPts val="1000"/>
+              </a:spcAft>
             </a:pPr>
             <a:r>
-              <a:t>Metadata + docs make datasets usable beyond their author</a:t>
-            </a:r>
-          </a:p>
-        </p:txBody>
-      </p:sp>
-    </p:spTree>
-  </p:cSld>
-  <p:clrMapOvr>
-    <a:masterClrMapping/>
-  </p:clrMapOvr>
-</p:sld>
-</file>
-
-<file path=ppt/slides/slide8.xml><?xml version="1.0" encoding="utf-8"?>
-<p:sld xmlns:a="http://schemas.openxmlformats.org/drawingml/2006/main" xmlns:p="http://schemas.openxmlformats.org/presentationml/2006/main" xmlns:r="http://schemas.openxmlformats.org/officeDocument/2006/relationships">
-  <p:cSld>
-    <p:spTree>
-      <p:nvGrpSpPr>
-        <p:cNvPr id="1" name=""/>
-        <p:cNvGrpSpPr/>
-        <p:nvPr/>
-      </p:nvGrpSpPr>
-      <p:grpSpPr/>
-      <p:sp>
-        <p:nvSpPr>
-          <p:cNvPr id="2" name="TextBox 1"/>
+              <a:rPr sz="2000" b="0">
+                <a:solidFill>
+                  <a:srgbClr val="333333"/>
+                </a:solidFill>
+                <a:latin typeface="Calibri"/>
+              </a:rPr>
+              <a:t>• Metadata + docs make datasets usable beyond their</a:t>
+            </a:r>
+          </a:p>
+          <a:p>
+            <a:pPr>
+              <a:lnSpc>
+                <a:spcPts val="2200"/>
+              </a:lnSpc>
+              <a:spcAft>
+                <a:spcPts val="1000"/>
+              </a:spcAft>
+            </a:pPr>
+            <a:r>
+              <a:rPr sz="2000" b="0">
+                <a:solidFill>
+                  <a:srgbClr val="333333"/>
+                </a:solidFill>
+                <a:latin typeface="Calibri"/>
+              </a:rPr>
+              <a:t>      author</a:t>
+            </a:r>
+          </a:p>
+        </p:txBody>
+      </p:sp>
+      <p:sp>
+        <p:nvSpPr>
+          <p:cNvPr id="4" name="TextBox 3"/>
           <p:cNvSpPr txBox="1"/>
           <p:nvPr/>
         </p:nvSpPr>
         <p:spPr>
           <a:xfrm>
-            <a:off x="548640" y="320040"/>
-            <a:ext cx="11064240" cy="914400"/>
+            <a:off x="548640" y="6355080"/>
+            <a:ext cx="11064240" cy="320040"/>
           </a:xfrm>
           <a:prstGeom prst="rect">
             <a:avLst/>
@@ -3808,55 +4946,24 @@
           <a:noFill/>
         </p:spPr>
         <p:txBody>
-          <a:bodyPr wrap="none">
-            <a:spAutoFit/>
+          <a:bodyPr wrap="square">
+            <a:noAutofit/>
           </a:bodyPr>
           <a:lstStyle/>
           <a:p>
-            <a:pPr>
-              <a:defRPr sz="3200" b="1"/>
+            <a:pPr algn="r">
+              <a:lnSpc>
+                <a:spcPts val="2200"/>
+              </a:lnSpc>
+              <a:defRPr sz="1000" b="0">
+                <a:solidFill>
+                  <a:srgbClr val="666666"/>
+                </a:solidFill>
+                <a:latin typeface="Calibri"/>
+              </a:defRPr>
             </a:pPr>
             <a:r>
-              <a:t>Next</a:t>
-            </a:r>
-          </a:p>
-        </p:txBody>
-      </p:sp>
-      <p:sp>
-        <p:nvSpPr>
-          <p:cNvPr id="3" name="TextBox 2"/>
-          <p:cNvSpPr txBox="1"/>
-          <p:nvPr/>
-        </p:nvSpPr>
-        <p:spPr>
-          <a:xfrm>
-            <a:off x="731520" y="1280160"/>
-            <a:ext cx="10515600" cy="5029200"/>
-          </a:xfrm>
-          <a:prstGeom prst="rect">
-            <a:avLst/>
-          </a:prstGeom>
-          <a:noFill/>
-        </p:spPr>
-        <p:txBody>
-          <a:bodyPr wrap="square">
-            <a:spAutoFit/>
-          </a:bodyPr>
-          <a:lstStyle/>
-          <a:p>
-            <a:pPr>
-              <a:defRPr sz="2000"/>
-            </a:pPr>
-            <a:r>
-              <a:t>Complete the quiz for this clip</a:t>
-            </a:r>
-          </a:p>
-          <a:p>
-            <a:pPr>
-              <a:defRPr sz="2000"/>
-            </a:pPr>
-            <a:r>
-              <a:t>Then continue to: Exploring a dataset</a:t>
+              <a:t>Chapter 1 — Characteristics Of Good Datasets</a:t>
             </a:r>
           </a:p>
         </p:txBody>
@@ -4187,4 +5294,324 @@
   </a:objectDefaults>
   <a:extraClrSchemeLst/>
 </a:theme>
+</file>
+
+<file path=ppt/theme/theme2.xml><?xml version="1.0" encoding="utf-8"?>
+<a:theme xmlns:a="http://schemas.openxmlformats.org/drawingml/2006/main" name="Office Theme">
+  <a:themeElements>
+    <a:clrScheme name="Office">
+      <a:dk1>
+        <a:sysClr val="windowText" lastClr="000000"/>
+      </a:dk1>
+      <a:lt1>
+        <a:sysClr val="window" lastClr="FFFFFF"/>
+      </a:lt1>
+      <a:dk2>
+        <a:srgbClr val="1F497D"/>
+      </a:dk2>
+      <a:lt2>
+        <a:srgbClr val="EEECE1"/>
+      </a:lt2>
+      <a:accent1>
+        <a:srgbClr val="4F81BD"/>
+      </a:accent1>
+      <a:accent2>
+        <a:srgbClr val="C0504D"/>
+      </a:accent2>
+      <a:accent3>
+        <a:srgbClr val="9BBB59"/>
+      </a:accent3>
+      <a:accent4>
+        <a:srgbClr val="8064A2"/>
+      </a:accent4>
+      <a:accent5>
+        <a:srgbClr val="4BACC6"/>
+      </a:accent5>
+      <a:accent6>
+        <a:srgbClr val="F79646"/>
+      </a:accent6>
+      <a:hlink>
+        <a:srgbClr val="0000FF"/>
+      </a:hlink>
+      <a:folHlink>
+        <a:srgbClr val="800080"/>
+      </a:folHlink>
+    </a:clrScheme>
+    <a:fontScheme name="Office">
+      <a:majorFont>
+        <a:latin typeface="Calibri"/>
+        <a:ea typeface=""/>
+        <a:cs typeface=""/>
+        <a:font script="Jpan" typeface="ＭＳ Ｐゴシック"/>
+        <a:font script="Hang" typeface="맑은 고딕"/>
+        <a:font script="Hans" typeface="宋体"/>
+        <a:font script="Hant" typeface="新細明體"/>
+        <a:font script="Arab" typeface="Times New Roman"/>
+        <a:font script="Hebr" typeface="Times New Roman"/>
+        <a:font script="Thai" typeface="Angsana New"/>
+        <a:font script="Ethi" typeface="Nyala"/>
+        <a:font script="Beng" typeface="Vrinda"/>
+        <a:font script="Gujr" typeface="Shruti"/>
+        <a:font script="Khmr" typeface="MoolBoran"/>
+        <a:font script="Knda" typeface="Tunga"/>
+        <a:font script="Guru" typeface="Raavi"/>
+        <a:font script="Cans" typeface="Euphemia"/>
+        <a:font script="Cher" typeface="Plantagenet Cherokee"/>
+        <a:font script="Yiii" typeface="Microsoft Yi Baiti"/>
+        <a:font script="Tibt" typeface="Microsoft Himalaya"/>
+        <a:font script="Thaa" typeface="MV Boli"/>
+        <a:font script="Deva" typeface="Mangal"/>
+        <a:font script="Telu" typeface="Gautami"/>
+        <a:font script="Taml" typeface="Latha"/>
+        <a:font script="Syrc" typeface="Estrangelo Edessa"/>
+        <a:font script="Orya" typeface="Kalinga"/>
+        <a:font script="Mlym" typeface="Kartika"/>
+        <a:font script="Laoo" typeface="DokChampa"/>
+        <a:font script="Sinh" typeface="Iskoola Pota"/>
+        <a:font script="Mong" typeface="Mongolian Baiti"/>
+        <a:font script="Viet" typeface="Times New Roman"/>
+        <a:font script="Uigh" typeface="Microsoft Uighur"/>
+        <a:font script="Geor" typeface="Sylfaen"/>
+      </a:majorFont>
+      <a:minorFont>
+        <a:latin typeface="Calibri"/>
+        <a:ea typeface=""/>
+        <a:cs typeface=""/>
+        <a:font script="Jpan" typeface="ＭＳ Ｐゴシック"/>
+        <a:font script="Hang" typeface="맑은 고딕"/>
+        <a:font script="Hans" typeface="宋体"/>
+        <a:font script="Hant" typeface="新細明體"/>
+        <a:font script="Arab" typeface="Arial"/>
+        <a:font script="Hebr" typeface="Arial"/>
+        <a:font script="Thai" typeface="Cordia New"/>
+        <a:font script="Ethi" typeface="Nyala"/>
+        <a:font script="Beng" typeface="Vrinda"/>
+        <a:font script="Gujr" typeface="Shruti"/>
+        <a:font script="Khmr" typeface="DaunPenh"/>
+        <a:font script="Knda" typeface="Tunga"/>
+        <a:font script="Guru" typeface="Raavi"/>
+        <a:font script="Cans" typeface="Euphemia"/>
+        <a:font script="Cher" typeface="Plantagenet Cherokee"/>
+        <a:font script="Yiii" typeface="Microsoft Yi Baiti"/>
+        <a:font script="Tibt" typeface="Microsoft Himalaya"/>
+        <a:font script="Thaa" typeface="MV Boli"/>
+        <a:font script="Deva" typeface="Mangal"/>
+        <a:font script="Telu" typeface="Gautami"/>
+        <a:font script="Taml" typeface="Latha"/>
+        <a:font script="Syrc" typeface="Estrangelo Edessa"/>
+        <a:font script="Orya" typeface="Kalinga"/>
+        <a:font script="Mlym" typeface="Kartika"/>
+        <a:font script="Laoo" typeface="DokChampa"/>
+        <a:font script="Sinh" typeface="Iskoola Pota"/>
+        <a:font script="Mong" typeface="Mongolian Baiti"/>
+        <a:font script="Viet" typeface="Arial"/>
+        <a:font script="Uigh" typeface="Microsoft Uighur"/>
+        <a:font script="Geor" typeface="Sylfaen"/>
+      </a:minorFont>
+    </a:fontScheme>
+    <a:fmtScheme name="Office">
+      <a:fillStyleLst>
+        <a:solidFill>
+          <a:schemeClr val="phClr"/>
+        </a:solidFill>
+        <a:gradFill rotWithShape="1">
+          <a:gsLst>
+            <a:gs pos="0">
+              <a:schemeClr val="phClr">
+                <a:tint val="50000"/>
+                <a:satMod val="300000"/>
+              </a:schemeClr>
+            </a:gs>
+            <a:gs pos="35000">
+              <a:schemeClr val="phClr">
+                <a:tint val="37000"/>
+                <a:satMod val="300000"/>
+              </a:schemeClr>
+            </a:gs>
+            <a:gs pos="100000">
+              <a:schemeClr val="phClr">
+                <a:tint val="15000"/>
+                <a:satMod val="350000"/>
+              </a:schemeClr>
+            </a:gs>
+          </a:gsLst>
+          <a:lin ang="16200000" scaled="1"/>
+        </a:gradFill>
+        <a:gradFill rotWithShape="1">
+          <a:gsLst>
+            <a:gs pos="0">
+              <a:schemeClr val="phClr">
+                <a:tint val="100000"/>
+                <a:shade val="100000"/>
+                <a:satMod val="130000"/>
+              </a:schemeClr>
+            </a:gs>
+            <a:gs pos="100000">
+              <a:schemeClr val="phClr">
+                <a:tint val="50000"/>
+                <a:shade val="100000"/>
+                <a:satMod val="350000"/>
+              </a:schemeClr>
+            </a:gs>
+          </a:gsLst>
+          <a:lin ang="16200000" scaled="0"/>
+        </a:gradFill>
+      </a:fillStyleLst>
+      <a:lnStyleLst>
+        <a:ln w="9525" cap="flat" cmpd="sng" algn="ctr">
+          <a:solidFill>
+            <a:schemeClr val="phClr">
+              <a:shade val="95000"/>
+              <a:satMod val="105000"/>
+            </a:schemeClr>
+          </a:solidFill>
+          <a:prstDash val="solid"/>
+        </a:ln>
+        <a:ln w="25400" cap="flat" cmpd="sng" algn="ctr">
+          <a:solidFill>
+            <a:schemeClr val="phClr"/>
+          </a:solidFill>
+          <a:prstDash val="solid"/>
+        </a:ln>
+        <a:ln w="38100" cap="flat" cmpd="sng" algn="ctr">
+          <a:solidFill>
+            <a:schemeClr val="phClr"/>
+          </a:solidFill>
+          <a:prstDash val="solid"/>
+        </a:ln>
+      </a:lnStyleLst>
+      <a:effectStyleLst>
+        <a:effectStyle>
+          <a:effectLst>
+            <a:outerShdw blurRad="40000" dist="20000" dir="5400000" rotWithShape="0">
+              <a:srgbClr val="000000">
+                <a:alpha val="38000"/>
+              </a:srgbClr>
+            </a:outerShdw>
+          </a:effectLst>
+        </a:effectStyle>
+        <a:effectStyle>
+          <a:effectLst>
+            <a:outerShdw blurRad="40000" dist="23000" dir="5400000" rotWithShape="0">
+              <a:srgbClr val="000000">
+                <a:alpha val="35000"/>
+              </a:srgbClr>
+            </a:outerShdw>
+          </a:effectLst>
+        </a:effectStyle>
+        <a:effectStyle>
+          <a:effectLst>
+            <a:outerShdw blurRad="40000" dist="23000" dir="5400000" rotWithShape="0">
+              <a:srgbClr val="000000">
+                <a:alpha val="35000"/>
+              </a:srgbClr>
+            </a:outerShdw>
+          </a:effectLst>
+          <a:scene3d>
+            <a:camera prst="orthographicFront">
+              <a:rot lat="0" lon="0" rev="0"/>
+            </a:camera>
+            <a:lightRig rig="threePt" dir="t">
+              <a:rot lat="0" lon="0" rev="1200000"/>
+            </a:lightRig>
+          </a:scene3d>
+          <a:sp3d>
+            <a:bevelT w="63500" h="25400"/>
+          </a:sp3d>
+        </a:effectStyle>
+      </a:effectStyleLst>
+      <a:bgFillStyleLst>
+        <a:solidFill>
+          <a:schemeClr val="phClr"/>
+        </a:solidFill>
+        <a:gradFill rotWithShape="1">
+          <a:gsLst>
+            <a:gs pos="0">
+              <a:schemeClr val="phClr">
+                <a:tint val="40000"/>
+                <a:satMod val="350000"/>
+              </a:schemeClr>
+            </a:gs>
+            <a:gs pos="40000">
+              <a:schemeClr val="phClr">
+                <a:tint val="45000"/>
+                <a:shade val="99000"/>
+                <a:satMod val="350000"/>
+              </a:schemeClr>
+            </a:gs>
+            <a:gs pos="100000">
+              <a:schemeClr val="phClr">
+                <a:shade val="20000"/>
+                <a:satMod val="255000"/>
+              </a:schemeClr>
+            </a:gs>
+          </a:gsLst>
+          <a:path path="circle">
+            <a:fillToRect l="50000" t="-80000" r="50000" b="180000"/>
+          </a:path>
+        </a:gradFill>
+        <a:gradFill rotWithShape="1">
+          <a:gsLst>
+            <a:gs pos="0">
+              <a:schemeClr val="phClr">
+                <a:tint val="80000"/>
+                <a:satMod val="300000"/>
+              </a:schemeClr>
+            </a:gs>
+            <a:gs pos="100000">
+              <a:schemeClr val="phClr">
+                <a:shade val="30000"/>
+                <a:satMod val="200000"/>
+              </a:schemeClr>
+            </a:gs>
+          </a:gsLst>
+          <a:path path="circle">
+            <a:fillToRect l="50000" t="50000" r="50000" b="50000"/>
+          </a:path>
+        </a:gradFill>
+      </a:bgFillStyleLst>
+    </a:fmtScheme>
+  </a:themeElements>
+  <a:objectDefaults>
+    <a:spDef>
+      <a:spPr/>
+      <a:bodyPr/>
+      <a:lstStyle/>
+      <a:style>
+        <a:lnRef idx="1">
+          <a:schemeClr val="accent1"/>
+        </a:lnRef>
+        <a:fillRef idx="3">
+          <a:schemeClr val="accent1"/>
+        </a:fillRef>
+        <a:effectRef idx="2">
+          <a:schemeClr val="accent1"/>
+        </a:effectRef>
+        <a:fontRef idx="minor">
+          <a:schemeClr val="lt1"/>
+        </a:fontRef>
+      </a:style>
+    </a:spDef>
+    <a:lnDef>
+      <a:spPr/>
+      <a:bodyPr/>
+      <a:lstStyle/>
+      <a:style>
+        <a:lnRef idx="2">
+          <a:schemeClr val="accent1"/>
+        </a:lnRef>
+        <a:fillRef idx="0">
+          <a:schemeClr val="accent1"/>
+        </a:fillRef>
+        <a:effectRef idx="1">
+          <a:schemeClr val="accent1"/>
+        </a:effectRef>
+        <a:fontRef idx="minor">
+          <a:schemeClr val="tx1"/>
+        </a:fontRef>
+      </a:style>
+    </a:lnDef>
+  </a:objectDefaults>
+  <a:extraClrSchemeLst/>
+</a:theme>
 </file>
--- a/chapter1/clips/clip-04-characteristics-of-good-datasets/clip.pptx
+++ b/chapter1/clips/clip-04-characteristics-of-good-datasets/clip.pptx
@@ -6,12 +6,14 @@
   </p:sldMasterIdLst>
   <p:sldIdLst>
     <p:sldId id="256" r:id="rId7"/>
-    <p:sldId id="257" r:id="rId8"/>
-    <p:sldId id="258" r:id="rId9"/>
-    <p:sldId id="259" r:id="rId10"/>
+    <p:sldId id="257" r:id="rId9"/>
+    <p:sldId id="258" r:id="rId10"/>
+    <p:sldId id="259" r:id="rId11"/>
     <p:sldId id="260" r:id="rId12"/>
     <p:sldId id="261" r:id="rId13"/>
     <p:sldId id="262" r:id="rId14"/>
+    <p:sldId id="263" r:id="rId15"/>
+    <p:sldId id="264" r:id="rId16"/>
   </p:sldIdLst>
   <p:sldSz cx="12191695" cy="6858000" type="screen4x3"/>
   <p:notesSz cx="6858000" cy="9144000"/>
@@ -508,17 +510,7 @@
           <a:lstStyle/>
           <a:p>
             <a:r>
-              <a:t>Setting: financial ledger with a mis-keyed amount</a:t>
-            </a:r>
-          </a:p>
-          <a:p>
-            <a:r>
-              <a:t>Key idea: one extra zero shifts monthly revenue by 10×</a:t>
-            </a:r>
-          </a:p>
-          <a:p>
-            <a:r>
-              <a:t>Accuracy failures distort aggregates and forecasts</a:t>
+              <a:t>Knowing a file's type and format is not enough. This clip treats quality as a bundle of properties judged relative to an intended task.</a:t>
             </a:r>
           </a:p>
         </p:txBody>
@@ -588,17 +580,427 @@
           <a:lstStyle/>
           <a:p>
             <a:r>
-              <a:t>Metadata: who, when, schema, units, provenance</a:t>
-            </a:r>
-          </a:p>
-          <a:p>
-            <a:r>
-              <a:t>Documentation: how to interpret and reuse the file</a:t>
-            </a:r>
-          </a:p>
-          <a:p>
-            <a:r>
-              <a:t>Example 1.14: weather dataset metadata fields</a:t>
+              <a:t>You will list five widely cited dimensions, diagnose concrete defects in accuracy, completeness, and consistency, and explain why metadata and documentation make a dataset reusable.</a:t>
+            </a:r>
+          </a:p>
+        </p:txBody>
+      </p:sp>
+      <p:sp>
+        <p:nvSpPr>
+          <p:cNvPr id="4" name="Slide Number Placeholder 3"/>
+          <p:cNvSpPr>
+            <a:spLocks noGrp="1"/>
+          </p:cNvSpPr>
+          <p:nvPr>
+            <p:ph type="sldNum" idx="5" sz="quarter"/>
+          </p:nvPr>
+        </p:nvSpPr>
+        <p:spPr/>
+      </p:sp>
+    </p:spTree>
+  </p:cSld>
+  <p:clrMapOvr>
+    <a:masterClrMapping/>
+  </p:clrMapOvr>
+</p:notes>
+</file>
+
+<file path=ppt/notesSlides/notesSlide3.xml><?xml version="1.0" encoding="utf-8"?>
+<p:notes xmlns:a="http://schemas.openxmlformats.org/drawingml/2006/main" xmlns:p="http://schemas.openxmlformats.org/presentationml/2006/main" xmlns:r="http://schemas.openxmlformats.org/officeDocument/2006/relationships">
+  <p:cSld>
+    <p:spTree>
+      <p:nvGrpSpPr>
+        <p:cNvPr id="1" name=""/>
+        <p:cNvGrpSpPr/>
+        <p:nvPr/>
+      </p:nvGrpSpPr>
+      <p:grpSpPr>
+        <a:xfrm>
+          <a:off x="0" y="0"/>
+          <a:ext cx="0" cy="0"/>
+          <a:chOff x="0" y="0"/>
+          <a:chExt cx="0" cy="0"/>
+        </a:xfrm>
+      </p:grpSpPr>
+      <p:sp>
+        <p:nvSpPr>
+          <p:cNvPr id="2" name="Slide Image Placeholder 1"/>
+          <p:cNvSpPr>
+            <a:spLocks noGrp="1"/>
+          </p:cNvSpPr>
+          <p:nvPr>
+            <p:ph type="sldImg" idx="2"/>
+          </p:nvPr>
+        </p:nvSpPr>
+        <p:spPr/>
+      </p:sp>
+      <p:sp>
+        <p:nvSpPr>
+          <p:cNvPr id="3" name="Notes Placeholder 2"/>
+          <p:cNvSpPr>
+            <a:spLocks noGrp="1"/>
+          </p:cNvSpPr>
+          <p:nvPr>
+            <p:ph type="body" idx="3" sz="quarter"/>
+          </p:nvPr>
+        </p:nvSpPr>
+        <p:spPr/>
+        <p:txBody>
+          <a:bodyPr/>
+          <a:lstStyle/>
+          <a:p>
+            <a:r>
+              <a:t>Table 1.6 in the chapter lists accuracy, completeness, consistency, relevance, and timeliness. None stands alone: a dataset can be complete yet inaccurate, or timely yet irrelevant to the question at hand. Assessment starts by asking whether values are trustworthy, sufficiently populated, comparable, and still on-question.</a:t>
+            </a:r>
+          </a:p>
+        </p:txBody>
+      </p:sp>
+      <p:sp>
+        <p:nvSpPr>
+          <p:cNvPr id="4" name="Slide Number Placeholder 3"/>
+          <p:cNvSpPr>
+            <a:spLocks noGrp="1"/>
+          </p:cNvSpPr>
+          <p:nvPr>
+            <p:ph type="sldNum" idx="5" sz="quarter"/>
+          </p:nvPr>
+        </p:nvSpPr>
+        <p:spPr/>
+      </p:sp>
+    </p:spTree>
+  </p:cSld>
+  <p:clrMapOvr>
+    <a:masterClrMapping/>
+  </p:clrMapOvr>
+</p:notes>
+</file>
+
+<file path=ppt/notesSlides/notesSlide4.xml><?xml version="1.0" encoding="utf-8"?>
+<p:notes xmlns:a="http://schemas.openxmlformats.org/drawingml/2006/main" xmlns:p="http://schemas.openxmlformats.org/presentationml/2006/main" xmlns:r="http://schemas.openxmlformats.org/officeDocument/2006/relationships">
+  <p:cSld>
+    <p:spTree>
+      <p:nvGrpSpPr>
+        <p:cNvPr id="1" name=""/>
+        <p:cNvGrpSpPr/>
+        <p:nvPr/>
+      </p:nvGrpSpPr>
+      <p:grpSpPr>
+        <a:xfrm>
+          <a:off x="0" y="0"/>
+          <a:ext cx="0" cy="0"/>
+          <a:chOff x="0" y="0"/>
+          <a:chExt cx="0" cy="0"/>
+        </a:xfrm>
+      </p:grpSpPr>
+      <p:sp>
+        <p:nvSpPr>
+          <p:cNvPr id="2" name="Slide Image Placeholder 1"/>
+          <p:cNvSpPr>
+            <a:spLocks noGrp="1"/>
+          </p:cNvSpPr>
+          <p:nvPr>
+            <p:ph type="sldImg" idx="2"/>
+          </p:nvPr>
+        </p:nvSpPr>
+        <p:spPr/>
+      </p:sp>
+      <p:sp>
+        <p:nvSpPr>
+          <p:cNvPr id="3" name="Notes Placeholder 2"/>
+          <p:cNvSpPr>
+            <a:spLocks noGrp="1"/>
+          </p:cNvSpPr>
+          <p:nvPr>
+            <p:ph type="body" idx="3" sz="quarter"/>
+          </p:nvPr>
+        </p:nvSpPr>
+        <p:spPr/>
+        <p:txBody>
+          <a:bodyPr/>
+          <a:lstStyle/>
+          <a:p>
+            <a:r>
+              <a:t>Example 1.11 shows a ledger where one transaction likely contains an extra zero. That single accuracy error changes monthly revenue by an order of magnitude and can distort averages and forecasts. Inspect the example 11 module and try to spot the suspicious amount.</a:t>
+            </a:r>
+          </a:p>
+        </p:txBody>
+      </p:sp>
+      <p:sp>
+        <p:nvSpPr>
+          <p:cNvPr id="4" name="Slide Number Placeholder 3"/>
+          <p:cNvSpPr>
+            <a:spLocks noGrp="1"/>
+          </p:cNvSpPr>
+          <p:nvPr>
+            <p:ph type="sldNum" idx="5" sz="quarter"/>
+          </p:nvPr>
+        </p:nvSpPr>
+        <p:spPr/>
+      </p:sp>
+    </p:spTree>
+  </p:cSld>
+  <p:clrMapOvr>
+    <a:masterClrMapping/>
+  </p:clrMapOvr>
+</p:notes>
+</file>
+
+<file path=ppt/notesSlides/notesSlide5.xml><?xml version="1.0" encoding="utf-8"?>
+<p:notes xmlns:a="http://schemas.openxmlformats.org/drawingml/2006/main" xmlns:p="http://schemas.openxmlformats.org/presentationml/2006/main" xmlns:r="http://schemas.openxmlformats.org/officeDocument/2006/relationships">
+  <p:cSld>
+    <p:spTree>
+      <p:nvGrpSpPr>
+        <p:cNvPr id="1" name=""/>
+        <p:cNvGrpSpPr/>
+        <p:nvPr/>
+      </p:nvGrpSpPr>
+      <p:grpSpPr>
+        <a:xfrm>
+          <a:off x="0" y="0"/>
+          <a:ext cx="0" cy="0"/>
+          <a:chOff x="0" y="0"/>
+          <a:chExt cx="0" cy="0"/>
+        </a:xfrm>
+      </p:grpSpPr>
+      <p:sp>
+        <p:nvSpPr>
+          <p:cNvPr id="2" name="Slide Image Placeholder 1"/>
+          <p:cNvSpPr>
+            <a:spLocks noGrp="1"/>
+          </p:cNvSpPr>
+          <p:nvPr>
+            <p:ph type="sldImg" idx="2"/>
+          </p:nvPr>
+        </p:nvSpPr>
+        <p:spPr/>
+      </p:sp>
+      <p:sp>
+        <p:nvSpPr>
+          <p:cNvPr id="3" name="Notes Placeholder 2"/>
+          <p:cNvSpPr>
+            <a:spLocks noGrp="1"/>
+          </p:cNvSpPr>
+          <p:nvPr>
+            <p:ph type="body" idx="3" sz="quarter"/>
+          </p:nvPr>
+        </p:nvSpPr>
+        <p:spPr/>
+        <p:txBody>
+          <a:bodyPr/>
+          <a:lstStyle/>
+          <a:p>
+            <a:r>
+              <a:t>Completeness failures—blank diagnosis or age cells—force models to guess or drop rows and can bias estimates when missingness is not random. Consistency failures—mixed regional date formats—break sorting until one convention is enforced. Later chapters develop systematic repair; here the goal is recognition.</a:t>
+            </a:r>
+          </a:p>
+        </p:txBody>
+      </p:sp>
+      <p:sp>
+        <p:nvSpPr>
+          <p:cNvPr id="4" name="Slide Number Placeholder 3"/>
+          <p:cNvSpPr>
+            <a:spLocks noGrp="1"/>
+          </p:cNvSpPr>
+          <p:nvPr>
+            <p:ph type="sldNum" idx="5" sz="quarter"/>
+          </p:nvPr>
+        </p:nvSpPr>
+        <p:spPr/>
+      </p:sp>
+    </p:spTree>
+  </p:cSld>
+  <p:clrMapOvr>
+    <a:masterClrMapping/>
+  </p:clrMapOvr>
+</p:notes>
+</file>
+
+<file path=ppt/notesSlides/notesSlide6.xml><?xml version="1.0" encoding="utf-8"?>
+<p:notes xmlns:a="http://schemas.openxmlformats.org/drawingml/2006/main" xmlns:p="http://schemas.openxmlformats.org/presentationml/2006/main" xmlns:r="http://schemas.openxmlformats.org/officeDocument/2006/relationships">
+  <p:cSld>
+    <p:spTree>
+      <p:nvGrpSpPr>
+        <p:cNvPr id="1" name=""/>
+        <p:cNvGrpSpPr/>
+        <p:nvPr/>
+      </p:nvGrpSpPr>
+      <p:grpSpPr>
+        <a:xfrm>
+          <a:off x="0" y="0"/>
+          <a:ext cx="0" cy="0"/>
+          <a:chOff x="0" y="0"/>
+          <a:chExt cx="0" cy="0"/>
+        </a:xfrm>
+      </p:grpSpPr>
+      <p:sp>
+        <p:nvSpPr>
+          <p:cNvPr id="2" name="Slide Image Placeholder 1"/>
+          <p:cNvSpPr>
+            <a:spLocks noGrp="1"/>
+          </p:cNvSpPr>
+          <p:nvPr>
+            <p:ph type="sldImg" idx="2"/>
+          </p:nvPr>
+        </p:nvSpPr>
+        <p:spPr/>
+      </p:sp>
+      <p:sp>
+        <p:nvSpPr>
+          <p:cNvPr id="3" name="Notes Placeholder 2"/>
+          <p:cNvSpPr>
+            <a:spLocks noGrp="1"/>
+          </p:cNvSpPr>
+          <p:nvPr>
+            <p:ph type="body" idx="3" sz="quarter"/>
+          </p:nvPr>
+        </p:nvSpPr>
+        <p:spPr/>
+        <p:txBody>
+          <a:bodyPr/>
+          <a:lstStyle/>
+          <a:p>
+            <a:r>
+              <a:t>Metadata records schema, units, provenance, and related context; documentation explains how to interpret and reuse the file. Example 1.14 illustrates metadata for a weather dataset. Without these, even accurate tables become hard to trust outside the original team. The example 14 module shows what good metadata looks like in practice.</a:t>
+            </a:r>
+          </a:p>
+        </p:txBody>
+      </p:sp>
+      <p:sp>
+        <p:nvSpPr>
+          <p:cNvPr id="4" name="Slide Number Placeholder 3"/>
+          <p:cNvSpPr>
+            <a:spLocks noGrp="1"/>
+          </p:cNvSpPr>
+          <p:nvPr>
+            <p:ph type="sldNum" idx="5" sz="quarter"/>
+          </p:nvPr>
+        </p:nvSpPr>
+        <p:spPr/>
+      </p:sp>
+    </p:spTree>
+  </p:cSld>
+  <p:clrMapOvr>
+    <a:masterClrMapping/>
+  </p:clrMapOvr>
+</p:notes>
+</file>
+
+<file path=ppt/notesSlides/notesSlide7.xml><?xml version="1.0" encoding="utf-8"?>
+<p:notes xmlns:a="http://schemas.openxmlformats.org/drawingml/2006/main" xmlns:p="http://schemas.openxmlformats.org/presentationml/2006/main" xmlns:r="http://schemas.openxmlformats.org/officeDocument/2006/relationships">
+  <p:cSld>
+    <p:spTree>
+      <p:nvGrpSpPr>
+        <p:cNvPr id="1" name=""/>
+        <p:cNvGrpSpPr/>
+        <p:nvPr/>
+      </p:nvGrpSpPr>
+      <p:grpSpPr>
+        <a:xfrm>
+          <a:off x="0" y="0"/>
+          <a:ext cx="0" cy="0"/>
+          <a:chOff x="0" y="0"/>
+          <a:chExt cx="0" cy="0"/>
+        </a:xfrm>
+      </p:grpSpPr>
+      <p:sp>
+        <p:nvSpPr>
+          <p:cNvPr id="2" name="Slide Image Placeholder 1"/>
+          <p:cNvSpPr>
+            <a:spLocks noGrp="1"/>
+          </p:cNvSpPr>
+          <p:nvPr>
+            <p:ph type="sldImg" idx="2"/>
+          </p:nvPr>
+        </p:nvSpPr>
+        <p:spPr/>
+      </p:sp>
+      <p:sp>
+        <p:nvSpPr>
+          <p:cNvPr id="3" name="Notes Placeholder 2"/>
+          <p:cNvSpPr>
+            <a:spLocks noGrp="1"/>
+          </p:cNvSpPr>
+          <p:nvPr>
+            <p:ph type="body" idx="3" sz="quarter"/>
+          </p:nvPr>
+        </p:nvSpPr>
+        <p:spPr/>
+        <p:txBody>
+          <a:bodyPr/>
+          <a:lstStyle/>
+          <a:p>
+            <a:r>
+              <a:t>Quality is multi-dimensional and task-relative. Learn to spot accuracy errors, missing fields, and format clashes early, and treat metadata plus documentation as part of the dataset—not optional extras.</a:t>
+            </a:r>
+          </a:p>
+        </p:txBody>
+      </p:sp>
+      <p:sp>
+        <p:nvSpPr>
+          <p:cNvPr id="4" name="Slide Number Placeholder 3"/>
+          <p:cNvSpPr>
+            <a:spLocks noGrp="1"/>
+          </p:cNvSpPr>
+          <p:nvPr>
+            <p:ph type="sldNum" idx="5" sz="quarter"/>
+          </p:nvPr>
+        </p:nvSpPr>
+        <p:spPr/>
+      </p:sp>
+    </p:spTree>
+  </p:cSld>
+  <p:clrMapOvr>
+    <a:masterClrMapping/>
+  </p:clrMapOvr>
+</p:notes>
+</file>
+
+<file path=ppt/notesSlides/notesSlide8.xml><?xml version="1.0" encoding="utf-8"?>
+<p:notes xmlns:a="http://schemas.openxmlformats.org/drawingml/2006/main" xmlns:p="http://schemas.openxmlformats.org/presentationml/2006/main" xmlns:r="http://schemas.openxmlformats.org/officeDocument/2006/relationships">
+  <p:cSld>
+    <p:spTree>
+      <p:nvGrpSpPr>
+        <p:cNvPr id="1" name=""/>
+        <p:cNvGrpSpPr/>
+        <p:nvPr/>
+      </p:nvGrpSpPr>
+      <p:grpSpPr>
+        <a:xfrm>
+          <a:off x="0" y="0"/>
+          <a:ext cx="0" cy="0"/>
+          <a:chOff x="0" y="0"/>
+          <a:chExt cx="0" cy="0"/>
+        </a:xfrm>
+      </p:grpSpPr>
+      <p:sp>
+        <p:nvSpPr>
+          <p:cNvPr id="2" name="Slide Image Placeholder 1"/>
+          <p:cNvSpPr>
+            <a:spLocks noGrp="1"/>
+          </p:cNvSpPr>
+          <p:nvPr>
+            <p:ph type="sldImg" idx="2"/>
+          </p:nvPr>
+        </p:nvSpPr>
+        <p:spPr/>
+      </p:sp>
+      <p:sp>
+        <p:nvSpPr>
+          <p:cNvPr id="3" name="Notes Placeholder 2"/>
+          <p:cNvSpPr>
+            <a:spLocks noGrp="1"/>
+          </p:cNvSpPr>
+          <p:nvPr>
+            <p:ph type="body" idx="3" sz="quarter"/>
+          </p:nvPr>
+        </p:nvSpPr>
+        <p:spPr/>
+        <p:txBody>
+          <a:bodyPr/>
+          <a:lstStyle/>
+          <a:p>
+            <a:r>
+              <a:t>Complete the quiz, then continue to exploring a dataset—the practical first pass for surfacing these issues.</a:t>
             </a:r>
           </a:p>
         </p:txBody>
@@ -3660,7 +4062,7 @@
                 </a:solidFill>
                 <a:latin typeface="Calibri"/>
               </a:rPr>
-              <a:t>Judge quality as a bundle of task-relative dimensions</a:t>
+              <a:t>Knowing a file's type and format is not enough</a:t>
             </a:r>
           </a:p>
         </p:txBody>
@@ -3699,7 +4101,7 @@
               </a:defRPr>
             </a:pPr>
             <a:r>
-              <a:t>Chapter 1 — Characteristics Of Good Datasets</a:t>
+              <a:t>Chapter 1 — 04 Characteristics Of Good Datasets</a:t>
             </a:r>
           </a:p>
         </p:txBody>
@@ -3784,12 +4186,13 @@
           <a:lstStyle/>
           <a:p>
             <a:pPr>
+              <a:spcAft>
+                <a:spcPts val="1000"/>
+              </a:spcAft>
+              <a:buChar char="•"/>
               <a:lnSpc>
                 <a:spcPts val="2200"/>
               </a:lnSpc>
-              <a:spcAft>
-                <a:spcPts val="1000"/>
-              </a:spcAft>
             </a:pPr>
             <a:r>
               <a:rPr sz="2000" b="0">
@@ -3798,64 +4201,7 @@
                 </a:solidFill>
                 <a:latin typeface="Calibri"/>
               </a:rPr>
-              <a:t>• List five quality dimensions from the chapter</a:t>
-            </a:r>
-          </a:p>
-          <a:p>
-            <a:pPr>
-              <a:lnSpc>
-                <a:spcPts val="2200"/>
-              </a:lnSpc>
-              <a:spcAft>
-                <a:spcPts val="1000"/>
-              </a:spcAft>
-            </a:pPr>
-            <a:r>
-              <a:rPr sz="2000" b="0">
-                <a:solidFill>
-                  <a:srgbClr val="333333"/>
-                </a:solidFill>
-                <a:latin typeface="Calibri"/>
-              </a:rPr>
-              <a:t>• Diagnose accuracy, completeness, and consistency</a:t>
-            </a:r>
-          </a:p>
-          <a:p>
-            <a:pPr>
-              <a:lnSpc>
-                <a:spcPts val="2200"/>
-              </a:lnSpc>
-              <a:spcAft>
-                <a:spcPts val="1000"/>
-              </a:spcAft>
-            </a:pPr>
-            <a:r>
-              <a:rPr sz="2000" b="0">
-                <a:solidFill>
-                  <a:srgbClr val="333333"/>
-                </a:solidFill>
-                <a:latin typeface="Calibri"/>
-              </a:rPr>
-              <a:t>      defects</a:t>
-            </a:r>
-          </a:p>
-          <a:p>
-            <a:pPr>
-              <a:lnSpc>
-                <a:spcPts val="2200"/>
-              </a:lnSpc>
-              <a:spcAft>
-                <a:spcPts val="1000"/>
-              </a:spcAft>
-            </a:pPr>
-            <a:r>
-              <a:rPr sz="2000" b="0">
-                <a:solidFill>
-                  <a:srgbClr val="333333"/>
-                </a:solidFill>
-                <a:latin typeface="Calibri"/>
-              </a:rPr>
-              <a:t>• Explain why metadata and documentation matter</a:t>
+              <a:t>Consistency, and explain why metadata and documentation make a dataset reusable</a:t>
             </a:r>
           </a:p>
         </p:txBody>
@@ -3894,7 +4240,7 @@
               </a:defRPr>
             </a:pPr>
             <a:r>
-              <a:t>Chapter 1 — Characteristics Of Good Datasets</a:t>
+              <a:t>Chapter 1 — 04 Characteristics Of Good Datasets</a:t>
             </a:r>
           </a:p>
         </p:txBody>
@@ -3979,68 +4325,53 @@
           <a:lstStyle/>
           <a:p>
             <a:pPr>
+              <a:spcAft>
+                <a:spcPts val="1000"/>
+              </a:spcAft>
+              <a:buChar char="•"/>
               <a:lnSpc>
                 <a:spcPts val="2200"/>
               </a:lnSpc>
+            </a:pPr>
+            <a:r>
+              <a:rPr sz="2000" b="0">
+                <a:solidFill>
+                  <a:srgbClr val="333333"/>
+                </a:solidFill>
+                <a:latin typeface="Calibri"/>
+              </a:rPr>
+              <a:t>Table 1.6 in the chapter lists accuracy, completeness, consistency, relevance</a:t>
+            </a:r>
+          </a:p>
+          <a:p>
+            <a:pPr>
               <a:spcAft>
                 <a:spcPts val="1000"/>
               </a:spcAft>
-            </a:pPr>
-            <a:r>
-              <a:rPr sz="2000" b="0">
-                <a:solidFill>
-                  <a:srgbClr val="333333"/>
-                </a:solidFill>
-                <a:latin typeface="Calibri"/>
-              </a:rPr>
-              <a:t>• </a:t>
-            </a:r>
-            <a:r>
-              <a:rPr sz="2000" b="1">
-                <a:solidFill>
-                  <a:srgbClr val="333333"/>
-                </a:solidFill>
-                <a:latin typeface="Calibri"/>
-              </a:rPr>
-              <a:t>Accuracy</a:t>
-            </a:r>
-            <a:r>
-              <a:rPr sz="2000" b="0">
-                <a:solidFill>
-                  <a:srgbClr val="333333"/>
-                </a:solidFill>
-                <a:latin typeface="Calibri"/>
-              </a:rPr>
-              <a:t> — values reflect ground truth closely</a:t>
-            </a:r>
-          </a:p>
-          <a:p>
-            <a:pPr>
+              <a:buChar char="•"/>
               <a:lnSpc>
                 <a:spcPts val="2200"/>
               </a:lnSpc>
+            </a:pPr>
+            <a:r>
+              <a:rPr sz="2000" b="0">
+                <a:solidFill>
+                  <a:srgbClr val="333333"/>
+                </a:solidFill>
+                <a:latin typeface="Calibri"/>
+              </a:rPr>
+              <a:t>None stands alone</a:t>
+            </a:r>
+          </a:p>
+          <a:p>
+            <a:pPr>
               <a:spcAft>
                 <a:spcPts val="1000"/>
               </a:spcAft>
-            </a:pPr>
-            <a:r>
-              <a:rPr sz="2000" b="0">
-                <a:solidFill>
-                  <a:srgbClr val="333333"/>
-                </a:solidFill>
-                <a:latin typeface="Calibri"/>
-              </a:rPr>
-              <a:t>      enough</a:t>
-            </a:r>
-          </a:p>
-          <a:p>
-            <a:pPr>
+              <a:buChar char="•"/>
               <a:lnSpc>
                 <a:spcPts val="2200"/>
               </a:lnSpc>
-              <a:spcAft>
-                <a:spcPts val="1000"/>
-              </a:spcAft>
             </a:pPr>
             <a:r>
               <a:rPr sz="2000" b="0">
@@ -4049,155 +4380,7 @@
                 </a:solidFill>
                 <a:latin typeface="Calibri"/>
               </a:rPr>
-              <a:t>• </a:t>
-            </a:r>
-            <a:r>
-              <a:rPr sz="2000" b="1">
-                <a:solidFill>
-                  <a:srgbClr val="333333"/>
-                </a:solidFill>
-                <a:latin typeface="Calibri"/>
-              </a:rPr>
-              <a:t>Completeness</a:t>
-            </a:r>
-            <a:r>
-              <a:rPr sz="2000" b="0">
-                <a:solidFill>
-                  <a:srgbClr val="333333"/>
-                </a:solidFill>
-                <a:latin typeface="Calibri"/>
-              </a:rPr>
-              <a:t> — needed records and attributes are</a:t>
-            </a:r>
-          </a:p>
-          <a:p>
-            <a:pPr>
-              <a:lnSpc>
-                <a:spcPts val="2200"/>
-              </a:lnSpc>
-              <a:spcAft>
-                <a:spcPts val="1000"/>
-              </a:spcAft>
-            </a:pPr>
-            <a:r>
-              <a:rPr sz="2000" b="0">
-                <a:solidFill>
-                  <a:srgbClr val="333333"/>
-                </a:solidFill>
-                <a:latin typeface="Calibri"/>
-              </a:rPr>
-              <a:t>      present</a:t>
-            </a:r>
-          </a:p>
-          <a:p>
-            <a:pPr>
-              <a:lnSpc>
-                <a:spcPts val="2200"/>
-              </a:lnSpc>
-              <a:spcAft>
-                <a:spcPts val="1000"/>
-              </a:spcAft>
-            </a:pPr>
-            <a:r>
-              <a:rPr sz="2000" b="0">
-                <a:solidFill>
-                  <a:srgbClr val="333333"/>
-                </a:solidFill>
-                <a:latin typeface="Calibri"/>
-              </a:rPr>
-              <a:t>• </a:t>
-            </a:r>
-            <a:r>
-              <a:rPr sz="2000" b="1">
-                <a:solidFill>
-                  <a:srgbClr val="333333"/>
-                </a:solidFill>
-                <a:latin typeface="Calibri"/>
-              </a:rPr>
-              <a:t>Consistency</a:t>
-            </a:r>
-            <a:r>
-              <a:rPr sz="2000" b="0">
-                <a:solidFill>
-                  <a:srgbClr val="333333"/>
-                </a:solidFill>
-                <a:latin typeface="Calibri"/>
-              </a:rPr>
-              <a:t> — uniform formats, units, definitions</a:t>
-            </a:r>
-          </a:p>
-          <a:p>
-            <a:pPr>
-              <a:lnSpc>
-                <a:spcPts val="2200"/>
-              </a:lnSpc>
-              <a:spcAft>
-                <a:spcPts val="1000"/>
-              </a:spcAft>
-            </a:pPr>
-            <a:r>
-              <a:rPr sz="2000" b="0">
-                <a:solidFill>
-                  <a:srgbClr val="333333"/>
-                </a:solidFill>
-                <a:latin typeface="Calibri"/>
-              </a:rPr>
-              <a:t>• </a:t>
-            </a:r>
-            <a:r>
-              <a:rPr sz="2000" b="1">
-                <a:solidFill>
-                  <a:srgbClr val="333333"/>
-                </a:solidFill>
-                <a:latin typeface="Calibri"/>
-              </a:rPr>
-              <a:t>Relevance</a:t>
-            </a:r>
-            <a:r>
-              <a:rPr sz="2000" b="0">
-                <a:solidFill>
-                  <a:srgbClr val="333333"/>
-                </a:solidFill>
-                <a:latin typeface="Calibri"/>
-              </a:rPr>
-              <a:t> — data answers the intended question</a:t>
-            </a:r>
-          </a:p>
-          <a:p>
-            <a:pPr>
-              <a:lnSpc>
-                <a:spcPts val="2200"/>
-              </a:lnSpc>
-              <a:spcAft>
-                <a:spcPts val="1000"/>
-              </a:spcAft>
-            </a:pPr>
-            <a:r>
-              <a:rPr sz="2000" b="0">
-                <a:solidFill>
-                  <a:srgbClr val="333333"/>
-                </a:solidFill>
-                <a:latin typeface="Calibri"/>
-              </a:rPr>
-              <a:t>• </a:t>
-            </a:r>
-            <a:r>
-              <a:rPr sz="2000" b="1">
-                <a:solidFill>
-                  <a:srgbClr val="333333"/>
-                </a:solidFill>
-                <a:latin typeface="Calibri"/>
-              </a:rPr>
-              <a:t>Timeliness</a:t>
-            </a:r>
-            <a:r>
-              <a:rPr sz="2000" b="0">
-                <a:solidFill>
-                  <a:srgbClr val="333333"/>
-                </a:solidFill>
-                <a:latin typeface="Calibri"/>
-              </a:rPr>
-              <a:t> — data is sufficiently up to date</a:t>
+              <a:t>Still on-question</a:t>
             </a:r>
           </a:p>
         </p:txBody>
@@ -4236,7 +4419,7 @@
               </a:defRPr>
             </a:pPr>
             <a:r>
-              <a:t>Chapter 1 — Characteristics Of Good Datasets</a:t>
+              <a:t>Chapter 1 — 04 Characteristics Of Good Datasets</a:t>
             </a:r>
           </a:p>
         </p:txBody>
@@ -4306,15 +4489,13 @@
         </p:nvSpPr>
         <p:spPr>
           <a:xfrm>
-            <a:off x="548640" y="1051560"/>
-            <a:ext cx="11064240" cy="914400"/>
+            <a:off x="548640" y="1234440"/>
+            <a:ext cx="11064240" cy="4937760"/>
           </a:xfrm>
           <a:prstGeom prst="rect">
             <a:avLst/>
           </a:prstGeom>
-          <a:solidFill>
-            <a:srgbClr val="F4F4F4"/>
-          </a:solidFill>
+          <a:noFill/>
         </p:spPr>
         <p:txBody>
           <a:bodyPr wrap="square">
@@ -4323,21 +4504,102 @@
           <a:lstStyle/>
           <a:p>
             <a:pPr>
+              <a:spcAft>
+                <a:spcPts val="1000"/>
+              </a:spcAft>
+              <a:buChar char="•"/>
               <a:lnSpc>
                 <a:spcPts val="2200"/>
               </a:lnSpc>
+            </a:pPr>
+            <a:r>
+              <a:rPr sz="2000" b="0">
+                <a:solidFill>
+                  <a:srgbClr val="333333"/>
+                </a:solidFill>
+                <a:latin typeface="Calibri"/>
+              </a:rPr>
+              <a:t>Example 1.11 — hands-on module</a:t>
+            </a:r>
+          </a:p>
+          <a:p>
+            <a:pPr>
               <a:spcAft>
-                <a:spcPts val="200"/>
+                <a:spcPts val="1000"/>
               </a:spcAft>
+              <a:buChar char="•"/>
+              <a:lnSpc>
+                <a:spcPts val="2200"/>
+              </a:lnSpc>
             </a:pPr>
             <a:r>
               <a:rPr sz="2000" b="0">
                 <a:solidFill>
                   <a:srgbClr val="333333"/>
                 </a:solidFill>
-                <a:latin typeface="Consolas"/>
+                <a:latin typeface="Calibri"/>
               </a:rPr>
-              <a:t>$ cd modules/chapter1/example11/ &amp;&amp; bash run.sh</a:t>
+              <a:t>Example 1.11 shows a ledger where one transaction likely contains an extra zero</a:t>
+            </a:r>
+          </a:p>
+          <a:p>
+            <a:pPr>
+              <a:spcAft>
+                <a:spcPts val="1000"/>
+              </a:spcAft>
+              <a:buChar char="•"/>
+              <a:lnSpc>
+                <a:spcPts val="2200"/>
+              </a:lnSpc>
+            </a:pPr>
+            <a:r>
+              <a:rPr sz="2000" b="0">
+                <a:solidFill>
+                  <a:srgbClr val="333333"/>
+                </a:solidFill>
+                <a:latin typeface="Calibri"/>
+              </a:rPr>
+              <a:t>That single accuracy error changes monthly revenue by an order of magnitude and can</a:t>
+            </a:r>
+          </a:p>
+          <a:p>
+            <a:pPr>
+              <a:spcAft>
+                <a:spcPts val="1000"/>
+              </a:spcAft>
+              <a:buChar char="•"/>
+              <a:lnSpc>
+                <a:spcPts val="2200"/>
+              </a:lnSpc>
+            </a:pPr>
+            <a:r>
+              <a:rPr sz="2000" b="0">
+                <a:solidFill>
+                  <a:srgbClr val="333333"/>
+                </a:solidFill>
+                <a:latin typeface="Calibri"/>
+              </a:rPr>
+              <a:t>Explore the chapter example module</a:t>
+            </a:r>
+          </a:p>
+          <a:p>
+            <a:pPr>
+              <a:spcAft>
+                <a:spcPts val="1000"/>
+              </a:spcAft>
+              <a:buChar char="•"/>
+              <a:lnSpc>
+                <a:spcPts val="2200"/>
+              </a:lnSpc>
+            </a:pPr>
+            <a:r>
+              <a:rPr sz="2000" b="0">
+                <a:solidFill>
+                  <a:srgbClr val="333333"/>
+                </a:solidFill>
+                <a:latin typeface="Calibri"/>
+              </a:rPr>
+              <a:t>View files: `modules/chapter1/example11/`</a:t>
             </a:r>
           </a:p>
         </p:txBody>
@@ -4376,7 +4638,7 @@
               </a:defRPr>
             </a:pPr>
             <a:r>
-              <a:t>Chapter 1 — Characteristics Of Good Datasets</a:t>
+              <a:t>Chapter 1 — 04 Characteristics Of Good Datasets</a:t>
             </a:r>
           </a:p>
         </p:txBody>
@@ -4433,7 +4695,7 @@
                 </a:solidFill>
                 <a:latin typeface="Calibri"/>
               </a:rPr>
-              <a:t>Completeness and consistency</a:t>
+              <a:t>Example 1.11 — listing</a:t>
             </a:r>
           </a:p>
         </p:txBody>
@@ -4446,13 +4708,15 @@
         </p:nvSpPr>
         <p:spPr>
           <a:xfrm>
-            <a:off x="548640" y="1234440"/>
-            <a:ext cx="11064240" cy="4937760"/>
+            <a:off x="548640" y="1143000"/>
+            <a:ext cx="11064240" cy="5029200"/>
           </a:xfrm>
           <a:prstGeom prst="rect">
             <a:avLst/>
           </a:prstGeom>
-          <a:noFill/>
+          <a:solidFill>
+            <a:srgbClr val="F4F4F4"/>
+          </a:solidFill>
         </p:spPr>
         <p:txBody>
           <a:bodyPr wrap="square">
@@ -4465,7 +4729,7 @@
                 <a:spcPts val="2200"/>
               </a:lnSpc>
               <a:spcAft>
-                <a:spcPts val="1000"/>
+                <a:spcPts val="400"/>
               </a:spcAft>
             </a:pPr>
             <a:r>
@@ -4473,9 +4737,9 @@
                 <a:solidFill>
                   <a:srgbClr val="333333"/>
                 </a:solidFill>
-                <a:latin typeface="Calibri"/>
+                <a:latin typeface="Consolas"/>
               </a:rPr>
-              <a:t>• Missing age or diagnosis fields bias clinical models</a:t>
+              <a:t>Txn_ID,Date,Account,Amount,Type</a:t>
             </a:r>
           </a:p>
           <a:p>
@@ -4484,7 +4748,7 @@
                 <a:spcPts val="2200"/>
               </a:lnSpc>
               <a:spcAft>
-                <a:spcPts val="1000"/>
+                <a:spcPts val="400"/>
               </a:spcAft>
             </a:pPr>
             <a:r>
@@ -4492,9 +4756,9 @@
                 <a:solidFill>
                   <a:srgbClr val="333333"/>
                 </a:solidFill>
-                <a:latin typeface="Calibri"/>
+                <a:latin typeface="Consolas"/>
               </a:rPr>
-              <a:t>      (eg:1.12)</a:t>
+              <a:t>T001,2024-03-01,Revenue,1500.00,Credit</a:t>
             </a:r>
           </a:p>
           <a:p>
@@ -4503,7 +4767,7 @@
                 <a:spcPts val="2200"/>
               </a:lnSpc>
               <a:spcAft>
-                <a:spcPts val="1000"/>
+                <a:spcPts val="400"/>
               </a:spcAft>
             </a:pPr>
             <a:r>
@@ -4511,9 +4775,9 @@
                 <a:solidFill>
                   <a:srgbClr val="333333"/>
                 </a:solidFill>
-                <a:latin typeface="Calibri"/>
+                <a:latin typeface="Consolas"/>
               </a:rPr>
-              <a:t>• Mixed date formats break chronological sorting</a:t>
+              <a:t>T002,2024-03-02,Revenue,15000.00,Credit</a:t>
             </a:r>
           </a:p>
           <a:p>
@@ -4522,7 +4786,7 @@
                 <a:spcPts val="2200"/>
               </a:lnSpc>
               <a:spcAft>
-                <a:spcPts val="1000"/>
+                <a:spcPts val="400"/>
               </a:spcAft>
             </a:pPr>
             <a:r>
@@ -4530,66 +4794,9 @@
                 <a:solidFill>
                   <a:srgbClr val="333333"/>
                 </a:solidFill>
-                <a:latin typeface="Calibri"/>
+                <a:latin typeface="Consolas"/>
               </a:rPr>
-              <a:t>      (eg:1.13)</a:t>
-            </a:r>
-          </a:p>
-          <a:p>
-            <a:pPr>
-              <a:lnSpc>
-                <a:spcPts val="2200"/>
-              </a:lnSpc>
-              <a:spcAft>
-                <a:spcPts val="1000"/>
-              </a:spcAft>
-            </a:pPr>
-            <a:r>
-              <a:rPr sz="2000" b="0">
-                <a:solidFill>
-                  <a:srgbClr val="333333"/>
-                </a:solidFill>
-                <a:latin typeface="Calibri"/>
-              </a:rPr>
-              <a:t>• Defects interact: complete yet inaccurate still</a:t>
-            </a:r>
-          </a:p>
-          <a:p>
-            <a:pPr>
-              <a:lnSpc>
-                <a:spcPts val="2200"/>
-              </a:lnSpc>
-              <a:spcAft>
-                <a:spcPts val="1000"/>
-              </a:spcAft>
-            </a:pPr>
-            <a:r>
-              <a:rPr sz="2000" b="0">
-                <a:solidFill>
-                  <a:srgbClr val="333333"/>
-                </a:solidFill>
-                <a:latin typeface="Calibri"/>
-              </a:rPr>
-              <a:t>      fails the task</a:t>
-            </a:r>
-          </a:p>
-          <a:p>
-            <a:pPr>
-              <a:lnSpc>
-                <a:spcPts val="2200"/>
-              </a:lnSpc>
-              <a:spcAft>
-                <a:spcPts val="1000"/>
-              </a:spcAft>
-            </a:pPr>
-            <a:r>
-              <a:rPr sz="2000" b="0">
-                <a:solidFill>
-                  <a:srgbClr val="333333"/>
-                </a:solidFill>
-                <a:latin typeface="Calibri"/>
-              </a:rPr>
-              <a:t>• Systematic repair is deferred to later chapters</a:t>
+              <a:t>T003,2024-03-03,Refund,50.00,Debit</a:t>
             </a:r>
           </a:p>
         </p:txBody>
@@ -4628,7 +4835,7 @@
               </a:defRPr>
             </a:pPr>
             <a:r>
-              <a:t>Chapter 1 — Characteristics Of Good Datasets</a:t>
+              <a:t>Chapter 1 — 04 Characteristics Of Good Datasets</a:t>
             </a:r>
           </a:p>
         </p:txBody>
@@ -4685,7 +4892,7 @@
                 </a:solidFill>
                 <a:latin typeface="Calibri"/>
               </a:rPr>
-              <a:t>Metadata and documentation</a:t>
+              <a:t>Completeness and consistency</a:t>
             </a:r>
           </a:p>
         </p:txBody>
@@ -4698,15 +4905,13 @@
         </p:nvSpPr>
         <p:spPr>
           <a:xfrm>
-            <a:off x="548640" y="1051560"/>
-            <a:ext cx="11064240" cy="914400"/>
+            <a:off x="548640" y="1234440"/>
+            <a:ext cx="11064240" cy="4937760"/>
           </a:xfrm>
           <a:prstGeom prst="rect">
             <a:avLst/>
           </a:prstGeom>
-          <a:solidFill>
-            <a:srgbClr val="F4F4F4"/>
-          </a:solidFill>
+          <a:noFill/>
         </p:spPr>
         <p:txBody>
           <a:bodyPr wrap="square">
@@ -4715,21 +4920,62 @@
           <a:lstStyle/>
           <a:p>
             <a:pPr>
+              <a:spcAft>
+                <a:spcPts val="1000"/>
+              </a:spcAft>
+              <a:buChar char="•"/>
               <a:lnSpc>
                 <a:spcPts val="2200"/>
               </a:lnSpc>
+            </a:pPr>
+            <a:r>
+              <a:rPr sz="2000" b="0">
+                <a:solidFill>
+                  <a:srgbClr val="333333"/>
+                </a:solidFill>
+                <a:latin typeface="Calibri"/>
+              </a:rPr>
+              <a:t>Completeness failures</a:t>
+            </a:r>
+          </a:p>
+          <a:p>
+            <a:pPr>
               <a:spcAft>
-                <a:spcPts val="200"/>
+                <a:spcPts val="1000"/>
               </a:spcAft>
+              <a:buChar char="•"/>
+              <a:lnSpc>
+                <a:spcPts val="2200"/>
+              </a:lnSpc>
             </a:pPr>
             <a:r>
               <a:rPr sz="2000" b="0">
                 <a:solidFill>
                   <a:srgbClr val="333333"/>
                 </a:solidFill>
-                <a:latin typeface="Consolas"/>
+                <a:latin typeface="Calibri"/>
               </a:rPr>
-              <a:t>$ cd modules/chapter1/example14/ &amp;&amp; bash run.sh</a:t>
+              <a:t>Consistency failures</a:t>
+            </a:r>
+          </a:p>
+          <a:p>
+            <a:pPr>
+              <a:spcAft>
+                <a:spcPts val="1000"/>
+              </a:spcAft>
+              <a:buChar char="•"/>
+              <a:lnSpc>
+                <a:spcPts val="2200"/>
+              </a:lnSpc>
+            </a:pPr>
+            <a:r>
+              <a:rPr sz="2000" b="0">
+                <a:solidFill>
+                  <a:srgbClr val="333333"/>
+                </a:solidFill>
+                <a:latin typeface="Calibri"/>
+              </a:rPr>
+              <a:t>Later chapters develop systematic repair; here the goal is recognition</a:t>
             </a:r>
           </a:p>
         </p:txBody>
@@ -4768,7 +5014,7 @@
               </a:defRPr>
             </a:pPr>
             <a:r>
-              <a:t>Chapter 1 — Characteristics Of Good Datasets</a:t>
+              <a:t>Chapter 1 — 04 Characteristics Of Good Datasets</a:t>
             </a:r>
           </a:p>
         </p:txBody>
@@ -4825,7 +5071,7 @@
                 </a:solidFill>
                 <a:latin typeface="Calibri"/>
               </a:rPr>
-              <a:t>Takeaways</a:t>
+              <a:t>Metadata and documentation</a:t>
             </a:r>
           </a:p>
         </p:txBody>
@@ -4853,69 +5099,73 @@
           <a:lstStyle/>
           <a:p>
             <a:pPr>
+              <a:spcAft>
+                <a:spcPts val="1000"/>
+              </a:spcAft>
+              <a:buChar char="•"/>
               <a:lnSpc>
                 <a:spcPts val="2200"/>
               </a:lnSpc>
+            </a:pPr>
+            <a:r>
+              <a:rPr sz="2000" b="0">
+                <a:solidFill>
+                  <a:srgbClr val="333333"/>
+                </a:solidFill>
+                <a:latin typeface="Calibri"/>
+              </a:rPr>
+              <a:t>Metadata records schema, units, provenance, and related context</a:t>
+            </a:r>
+          </a:p>
+          <a:p>
+            <a:pPr>
               <a:spcAft>
                 <a:spcPts val="1000"/>
               </a:spcAft>
-            </a:pPr>
-            <a:r>
-              <a:rPr sz="2000" b="0">
-                <a:solidFill>
-                  <a:srgbClr val="333333"/>
-                </a:solidFill>
-                <a:latin typeface="Calibri"/>
-              </a:rPr>
-              <a:t>• Quality is multi-dimensional and task-relative</a:t>
-            </a:r>
-          </a:p>
-          <a:p>
-            <a:pPr>
+              <a:buChar char="•"/>
               <a:lnSpc>
                 <a:spcPts val="2200"/>
               </a:lnSpc>
+            </a:pPr>
+            <a:r>
+              <a:rPr sz="2000" b="0">
+                <a:solidFill>
+                  <a:srgbClr val="333333"/>
+                </a:solidFill>
+                <a:latin typeface="Calibri"/>
+              </a:rPr>
+              <a:t>Example 1.14 illustrates metadata for a weather dataset</a:t>
+            </a:r>
+          </a:p>
+          <a:p>
+            <a:pPr>
               <a:spcAft>
                 <a:spcPts val="1000"/>
               </a:spcAft>
-            </a:pPr>
-            <a:r>
-              <a:rPr sz="2000" b="0">
-                <a:solidFill>
-                  <a:srgbClr val="333333"/>
-                </a:solidFill>
-                <a:latin typeface="Calibri"/>
-              </a:rPr>
-              <a:t>• Spot accuracy, missingness, and format clashes early</a:t>
-            </a:r>
-          </a:p>
-          <a:p>
-            <a:pPr>
+              <a:buChar char="•"/>
               <a:lnSpc>
                 <a:spcPts val="2200"/>
               </a:lnSpc>
+            </a:pPr>
+            <a:r>
+              <a:rPr sz="2000" b="0">
+                <a:solidFill>
+                  <a:srgbClr val="333333"/>
+                </a:solidFill>
+                <a:latin typeface="Calibri"/>
+              </a:rPr>
+              <a:t>Without these, even accurate tables become hard to trust outside the original team</a:t>
+            </a:r>
+          </a:p>
+          <a:p>
+            <a:pPr>
               <a:spcAft>
                 <a:spcPts val="1000"/>
               </a:spcAft>
-            </a:pPr>
-            <a:r>
-              <a:rPr sz="2000" b="0">
-                <a:solidFill>
-                  <a:srgbClr val="333333"/>
-                </a:solidFill>
-                <a:latin typeface="Calibri"/>
-              </a:rPr>
-              <a:t>• Metadata + docs make datasets usable beyond their</a:t>
-            </a:r>
-          </a:p>
-          <a:p>
-            <a:pPr>
+              <a:buChar char="•"/>
               <a:lnSpc>
                 <a:spcPts val="2200"/>
               </a:lnSpc>
-              <a:spcAft>
-                <a:spcPts val="1000"/>
-              </a:spcAft>
             </a:pPr>
             <a:r>
               <a:rPr sz="2000" b="0">
@@ -4924,7 +5174,7 @@
                 </a:solidFill>
                 <a:latin typeface="Calibri"/>
               </a:rPr>
-              <a:t>      author</a:t>
+              <a:t>The example 14 module shows what good metadata looks like in practice</a:t>
             </a:r>
           </a:p>
         </p:txBody>
@@ -4963,7 +5213,325 @@
               </a:defRPr>
             </a:pPr>
             <a:r>
-              <a:t>Chapter 1 — Characteristics Of Good Datasets</a:t>
+              <a:t>Chapter 1 — 04 Characteristics Of Good Datasets</a:t>
+            </a:r>
+          </a:p>
+        </p:txBody>
+      </p:sp>
+    </p:spTree>
+  </p:cSld>
+  <p:clrMapOvr>
+    <a:masterClrMapping/>
+  </p:clrMapOvr>
+</p:sld>
+</file>
+
+<file path=ppt/slides/slide8.xml><?xml version="1.0" encoding="utf-8"?>
+<p:sld xmlns:a="http://schemas.openxmlformats.org/drawingml/2006/main" xmlns:p="http://schemas.openxmlformats.org/presentationml/2006/main" xmlns:r="http://schemas.openxmlformats.org/officeDocument/2006/relationships">
+  <p:cSld>
+    <p:spTree>
+      <p:nvGrpSpPr>
+        <p:cNvPr id="1" name=""/>
+        <p:cNvGrpSpPr/>
+        <p:nvPr/>
+      </p:nvGrpSpPr>
+      <p:grpSpPr/>
+      <p:sp>
+        <p:nvSpPr>
+          <p:cNvPr id="2" name="TextBox 1"/>
+          <p:cNvSpPr txBox="1"/>
+          <p:nvPr/>
+        </p:nvSpPr>
+        <p:spPr>
+          <a:xfrm>
+            <a:off x="548640" y="411480"/>
+            <a:ext cx="11064240" cy="777240"/>
+          </a:xfrm>
+          <a:prstGeom prst="rect">
+            <a:avLst/>
+          </a:prstGeom>
+          <a:noFill/>
+        </p:spPr>
+        <p:txBody>
+          <a:bodyPr wrap="square">
+            <a:noAutofit/>
+          </a:bodyPr>
+          <a:lstStyle/>
+          <a:p>
+            <a:pPr>
+              <a:lnSpc>
+                <a:spcPts val="2200"/>
+              </a:lnSpc>
+            </a:pPr>
+            <a:r>
+              <a:rPr sz="2800" b="1">
+                <a:solidFill>
+                  <a:srgbClr val="1A1A2E"/>
+                </a:solidFill>
+                <a:latin typeface="Calibri"/>
+              </a:rPr>
+              <a:t>Takeaways</a:t>
+            </a:r>
+          </a:p>
+        </p:txBody>
+      </p:sp>
+      <p:sp>
+        <p:nvSpPr>
+          <p:cNvPr id="3" name="TextBox 2"/>
+          <p:cNvSpPr txBox="1"/>
+          <p:nvPr/>
+        </p:nvSpPr>
+        <p:spPr>
+          <a:xfrm>
+            <a:off x="548640" y="1234440"/>
+            <a:ext cx="11064240" cy="4937760"/>
+          </a:xfrm>
+          <a:prstGeom prst="rect">
+            <a:avLst/>
+          </a:prstGeom>
+          <a:noFill/>
+        </p:spPr>
+        <p:txBody>
+          <a:bodyPr wrap="square">
+            <a:noAutofit/>
+          </a:bodyPr>
+          <a:lstStyle/>
+          <a:p>
+            <a:pPr>
+              <a:spcAft>
+                <a:spcPts val="1000"/>
+              </a:spcAft>
+              <a:buChar char="•"/>
+              <a:lnSpc>
+                <a:spcPts val="2200"/>
+              </a:lnSpc>
+            </a:pPr>
+            <a:r>
+              <a:rPr sz="2000" b="0">
+                <a:solidFill>
+                  <a:srgbClr val="333333"/>
+                </a:solidFill>
+                <a:latin typeface="Calibri"/>
+              </a:rPr>
+              <a:t>Quality is multi-dimensional and task-relative</a:t>
+            </a:r>
+          </a:p>
+          <a:p>
+            <a:pPr>
+              <a:spcAft>
+                <a:spcPts val="1000"/>
+              </a:spcAft>
+              <a:buChar char="•"/>
+              <a:lnSpc>
+                <a:spcPts val="2200"/>
+              </a:lnSpc>
+            </a:pPr>
+            <a:r>
+              <a:rPr sz="2000" b="0">
+                <a:solidFill>
+                  <a:srgbClr val="333333"/>
+                </a:solidFill>
+                <a:latin typeface="Calibri"/>
+              </a:rPr>
+              <a:t>Learn to spot accuracy errors, missing fields</a:t>
+            </a:r>
+          </a:p>
+        </p:txBody>
+      </p:sp>
+      <p:sp>
+        <p:nvSpPr>
+          <p:cNvPr id="4" name="TextBox 3"/>
+          <p:cNvSpPr txBox="1"/>
+          <p:nvPr/>
+        </p:nvSpPr>
+        <p:spPr>
+          <a:xfrm>
+            <a:off x="548640" y="6355080"/>
+            <a:ext cx="11064240" cy="320040"/>
+          </a:xfrm>
+          <a:prstGeom prst="rect">
+            <a:avLst/>
+          </a:prstGeom>
+          <a:noFill/>
+        </p:spPr>
+        <p:txBody>
+          <a:bodyPr wrap="square">
+            <a:noAutofit/>
+          </a:bodyPr>
+          <a:lstStyle/>
+          <a:p>
+            <a:pPr algn="r">
+              <a:lnSpc>
+                <a:spcPts val="2200"/>
+              </a:lnSpc>
+              <a:defRPr sz="1000" b="0">
+                <a:solidFill>
+                  <a:srgbClr val="666666"/>
+                </a:solidFill>
+                <a:latin typeface="Calibri"/>
+              </a:defRPr>
+            </a:pPr>
+            <a:r>
+              <a:t>Chapter 1 — 04 Characteristics Of Good Datasets</a:t>
+            </a:r>
+          </a:p>
+        </p:txBody>
+      </p:sp>
+    </p:spTree>
+  </p:cSld>
+  <p:clrMapOvr>
+    <a:masterClrMapping/>
+  </p:clrMapOvr>
+</p:sld>
+</file>
+
+<file path=ppt/slides/slide9.xml><?xml version="1.0" encoding="utf-8"?>
+<p:sld xmlns:a="http://schemas.openxmlformats.org/drawingml/2006/main" xmlns:p="http://schemas.openxmlformats.org/presentationml/2006/main" xmlns:r="http://schemas.openxmlformats.org/officeDocument/2006/relationships">
+  <p:cSld>
+    <p:spTree>
+      <p:nvGrpSpPr>
+        <p:cNvPr id="1" name=""/>
+        <p:cNvGrpSpPr/>
+        <p:nvPr/>
+      </p:nvGrpSpPr>
+      <p:grpSpPr/>
+      <p:sp>
+        <p:nvSpPr>
+          <p:cNvPr id="2" name="TextBox 1"/>
+          <p:cNvSpPr txBox="1"/>
+          <p:nvPr/>
+        </p:nvSpPr>
+        <p:spPr>
+          <a:xfrm>
+            <a:off x="548640" y="411480"/>
+            <a:ext cx="11064240" cy="777240"/>
+          </a:xfrm>
+          <a:prstGeom prst="rect">
+            <a:avLst/>
+          </a:prstGeom>
+          <a:noFill/>
+        </p:spPr>
+        <p:txBody>
+          <a:bodyPr wrap="square">
+            <a:noAutofit/>
+          </a:bodyPr>
+          <a:lstStyle/>
+          <a:p>
+            <a:pPr>
+              <a:lnSpc>
+                <a:spcPts val="2200"/>
+              </a:lnSpc>
+            </a:pPr>
+            <a:r>
+              <a:rPr sz="2800" b="1">
+                <a:solidFill>
+                  <a:srgbClr val="1A1A2E"/>
+                </a:solidFill>
+                <a:latin typeface="Calibri"/>
+              </a:rPr>
+              <a:t>Next</a:t>
+            </a:r>
+          </a:p>
+        </p:txBody>
+      </p:sp>
+      <p:sp>
+        <p:nvSpPr>
+          <p:cNvPr id="3" name="TextBox 2"/>
+          <p:cNvSpPr txBox="1"/>
+          <p:nvPr/>
+        </p:nvSpPr>
+        <p:spPr>
+          <a:xfrm>
+            <a:off x="548640" y="1234440"/>
+            <a:ext cx="11064240" cy="4937760"/>
+          </a:xfrm>
+          <a:prstGeom prst="rect">
+            <a:avLst/>
+          </a:prstGeom>
+          <a:noFill/>
+        </p:spPr>
+        <p:txBody>
+          <a:bodyPr wrap="square">
+            <a:noAutofit/>
+          </a:bodyPr>
+          <a:lstStyle/>
+          <a:p>
+            <a:pPr>
+              <a:spcAft>
+                <a:spcPts val="1000"/>
+              </a:spcAft>
+              <a:buChar char="•"/>
+              <a:lnSpc>
+                <a:spcPts val="2200"/>
+              </a:lnSpc>
+            </a:pPr>
+            <a:r>
+              <a:rPr sz="2000" b="0">
+                <a:solidFill>
+                  <a:srgbClr val="333333"/>
+                </a:solidFill>
+                <a:latin typeface="Calibri"/>
+              </a:rPr>
+              <a:t>Complete the quiz for this clip</a:t>
+            </a:r>
+          </a:p>
+          <a:p>
+            <a:pPr>
+              <a:spcAft>
+                <a:spcPts val="1000"/>
+              </a:spcAft>
+              <a:buChar char="•"/>
+              <a:lnSpc>
+                <a:spcPts val="2200"/>
+              </a:lnSpc>
+            </a:pPr>
+            <a:r>
+              <a:rPr sz="2000" b="0">
+                <a:solidFill>
+                  <a:srgbClr val="333333"/>
+                </a:solidFill>
+                <a:latin typeface="Calibri"/>
+              </a:rPr>
+              <a:t>Complete the quiz</a:t>
+            </a:r>
+          </a:p>
+        </p:txBody>
+      </p:sp>
+      <p:sp>
+        <p:nvSpPr>
+          <p:cNvPr id="4" name="TextBox 3"/>
+          <p:cNvSpPr txBox="1"/>
+          <p:nvPr/>
+        </p:nvSpPr>
+        <p:spPr>
+          <a:xfrm>
+            <a:off x="548640" y="6355080"/>
+            <a:ext cx="11064240" cy="320040"/>
+          </a:xfrm>
+          <a:prstGeom prst="rect">
+            <a:avLst/>
+          </a:prstGeom>
+          <a:noFill/>
+        </p:spPr>
+        <p:txBody>
+          <a:bodyPr wrap="square">
+            <a:noAutofit/>
+          </a:bodyPr>
+          <a:lstStyle/>
+          <a:p>
+            <a:pPr algn="r">
+              <a:lnSpc>
+                <a:spcPts val="2200"/>
+              </a:lnSpc>
+              <a:defRPr sz="1000" b="0">
+                <a:solidFill>
+                  <a:srgbClr val="666666"/>
+                </a:solidFill>
+                <a:latin typeface="Calibri"/>
+              </a:defRPr>
+            </a:pPr>
+            <a:r>
+              <a:t>Chapter 1 — 04 Characteristics Of Good Datasets</a:t>
             </a:r>
           </a:p>
         </p:txBody>
